--- a/output/slide_v4.pptx
+++ b/output/slide_v4.pptx
@@ -10,8 +10,8 @@
   <p:notesMasterIdLst>
     <p:notesMasterId r:id="rId3"/>
   </p:notesMasterIdLst>
-  <p:sldSz cx="12192000" cy="6858000"/>
-  <p:notesSz cx="6858000" cy="12192000"/>
+  <p:sldSz cx="9144000" cy="5143500"/>
+  <p:notesSz cx="5143500" cy="9144000"/>
   <p:defaultTextStyle>
     <a:lvl1pPr marL="0" algn="l" defTabSz="914400" rtl="0" eaLnBrk="1" latinLnBrk="0" hangingPunct="1">
       <a:defRPr sz="1800" kern="1200">
@@ -883,8 +883,8 @@
         </p:nvSpPr>
         <p:spPr>
           <a:xfrm>
-            <a:off x="457200" y="320040"/>
-            <a:ext cx="11274552" cy="777240"/>
+            <a:off x="457200" y="182880"/>
+            <a:ext cx="8229600" cy="594360"/>
           </a:xfrm>
           <a:prstGeom prst="rect">
             <a:avLst/>
@@ -893,14 +893,17 @@
           <a:ln/>
         </p:spPr>
         <p:txBody>
-          <a:bodyPr wrap="square" lIns="0" tIns="0" rIns="0" bIns="0" rtlCol="0" anchor="t"/>
+          <a:bodyPr wrap="square" lIns="0" tIns="0" rIns="0" bIns="0" rtlCol="0" anchor="ctr"/>
           <a:lstStyle/>
           <a:p>
             <a:pPr indent="0" marL="0">
+              <a:lnSpc>
+                <a:spcPct val="115000"/>
+              </a:lnSpc>
               <a:buNone/>
             </a:pPr>
             <a:r>
-              <a:rPr lang="en-US" sz="2200" b="1" dirty="0">
+              <a:rPr lang="en-US" sz="1600" b="1" dirty="0">
                 <a:solidFill>
                   <a:srgbClr val="000000"/>
                 </a:solidFill>
@@ -908,9 +911,9 @@
                 <a:ea typeface="Georgia" pitchFamily="34" charset="-122"/>
                 <a:cs typeface="Georgia" pitchFamily="34" charset="-120"/>
               </a:rPr>
-              <a:t>The Netherlands aims to become Europe's green hydrogen hub, scaling from 500 MW to 3–4 GW by 2030</a:t>
+              <a:t>1.1/ Blue H2 is cheaper today, but Green H2 is the 'new solar' with costs decreasing rapidly</a:t>
             </a:r>
-            <a:endParaRPr lang="en-US" sz="2200" dirty="0"/>
+            <a:endParaRPr lang="en-US" sz="1600" dirty="0"/>
           </a:p>
         </p:txBody>
       </p:sp>
@@ -922,8 +925,8 @@
         </p:nvSpPr>
         <p:spPr>
           <a:xfrm>
-            <a:off x="457200" y="1143000"/>
-            <a:ext cx="11274552" cy="228600"/>
+            <a:off x="457200" y="804672"/>
+            <a:ext cx="4572000" cy="164592"/>
           </a:xfrm>
           <a:prstGeom prst="rect">
             <a:avLst/>
@@ -932,24 +935,24 @@
           <a:ln/>
         </p:spPr>
         <p:txBody>
-          <a:bodyPr wrap="square" lIns="0" tIns="0" rIns="0" bIns="0" rtlCol="0" anchor="t"/>
+          <a:bodyPr wrap="square" lIns="0" tIns="0" rIns="0" bIns="0" rtlCol="0" anchor="ctr"/>
           <a:lstStyle/>
           <a:p>
             <a:pPr indent="0" marL="0">
               <a:buNone/>
             </a:pPr>
             <a:r>
-              <a:rPr lang="en-US" sz="1000" dirty="0">
+              <a:rPr lang="en-US" sz="900" dirty="0">
                 <a:solidFill>
-                  <a:srgbClr val="888888"/>
+                  <a:srgbClr val="666666"/>
                 </a:solidFill>
                 <a:latin typeface="Calibri" pitchFamily="34" charset="0"/>
                 <a:ea typeface="Calibri" pitchFamily="34" charset="-122"/>
                 <a:cs typeface="Calibri" pitchFamily="34" charset="-120"/>
               </a:rPr>
-              <a:t>Dutch Hydrogen Strategy: Key milestones and targets (2020–2035)</a:t>
+              <a:t>Global H2 demand and production costs¹</a:t>
             </a:r>
-            <a:endParaRPr lang="en-US" sz="1000" dirty="0"/>
+            <a:endParaRPr lang="en-US" sz="900" dirty="0"/>
           </a:p>
         </p:txBody>
       </p:sp>
@@ -961,16 +964,16 @@
         </p:nvSpPr>
         <p:spPr>
           <a:xfrm>
-            <a:off x="457200" y="1417320"/>
-            <a:ext cx="11274552" cy="0"/>
+            <a:off x="457200" y="1005840"/>
+            <a:ext cx="8229600" cy="0"/>
           </a:xfrm>
           <a:prstGeom prst="line">
             <a:avLst/>
           </a:prstGeom>
           <a:noFill/>
-          <a:ln w="9525">
+          <a:ln w="12700">
             <a:solidFill>
-              <a:srgbClr val="C00000"/>
+              <a:srgbClr val="333333"/>
             </a:solidFill>
             <a:prstDash val="solid"/>
           </a:ln>
@@ -984,51 +987,28 @@
         </p:nvSpPr>
         <p:spPr>
           <a:xfrm>
-            <a:off x="822960" y="2560320"/>
-            <a:ext cx="10543032" cy="0"/>
+            <a:off x="6217920" y="1051560"/>
+            <a:ext cx="137160" cy="137160"/>
           </a:xfrm>
-          <a:prstGeom prst="line">
-            <a:avLst/>
-          </a:prstGeom>
-          <a:noFill/>
-          <a:ln w="25400">
-            <a:solidFill>
-              <a:srgbClr val="0C2340"/>
-            </a:solidFill>
-            <a:prstDash val="solid"/>
-          </a:ln>
-        </p:spPr>
-      </p:sp>
-      <p:sp>
-        <p:nvSpPr>
-          <p:cNvPr id="6" name="Shape 4"/>
-          <p:cNvSpPr/>
-          <p:nvPr/>
-        </p:nvSpPr>
-        <p:spPr>
-          <a:xfrm>
-            <a:off x="704088" y="2441448"/>
-            <a:ext cx="237744" cy="237744"/>
-          </a:xfrm>
-          <a:prstGeom prst="ellipse">
+          <a:prstGeom prst="rect">
             <a:avLst/>
           </a:prstGeom>
           <a:solidFill>
-            <a:srgbClr val="0C2340"/>
+            <a:srgbClr val="000000"/>
           </a:solidFill>
           <a:ln/>
         </p:spPr>
       </p:sp>
       <p:sp>
         <p:nvSpPr>
-          <p:cNvPr id="7" name="Text 5"/>
+          <p:cNvPr id="6" name="Text 4"/>
           <p:cNvSpPr/>
           <p:nvPr/>
         </p:nvSpPr>
         <p:spPr>
           <a:xfrm>
-            <a:off x="704088" y="2441448"/>
-            <a:ext cx="237744" cy="237744"/>
+            <a:off x="6400800" y="1051560"/>
+            <a:ext cx="1097280" cy="137160"/>
           </a:xfrm>
           <a:prstGeom prst="rect">
             <a:avLst/>
@@ -1040,42 +1020,44 @@
           <a:bodyPr wrap="square" lIns="0" tIns="0" rIns="0" bIns="0" rtlCol="0" anchor="ctr"/>
           <a:lstStyle/>
           <a:p>
-            <a:pPr algn="ctr" indent="0" marL="0">
+            <a:pPr indent="0" marL="0">
               <a:buNone/>
             </a:pPr>
             <a:r>
-              <a:rPr lang="en-US" sz="750" b="1" dirty="0">
+              <a:rPr lang="en-US" sz="700" dirty="0">
                 <a:solidFill>
-                  <a:srgbClr val="FFFFFF"/>
+                  <a:srgbClr val="333333"/>
                 </a:solidFill>
                 <a:latin typeface="Calibri" pitchFamily="34" charset="0"/>
                 <a:ea typeface="Calibri" pitchFamily="34" charset="-122"/>
                 <a:cs typeface="Calibri" pitchFamily="34" charset="-120"/>
               </a:rPr>
-              <a:t>2020</a:t>
+              <a:t>Least-cost option</a:t>
             </a:r>
-            <a:endParaRPr lang="en-US" sz="750" dirty="0"/>
+            <a:endParaRPr lang="en-US" sz="700" dirty="0"/>
           </a:p>
         </p:txBody>
       </p:sp>
       <p:sp>
         <p:nvSpPr>
-          <p:cNvPr id="8" name="Shape 6"/>
+          <p:cNvPr id="7" name="Shape 5"/>
           <p:cNvSpPr/>
           <p:nvPr/>
         </p:nvSpPr>
         <p:spPr>
           <a:xfrm>
-            <a:off x="822960" y="2304288"/>
-            <a:ext cx="0" cy="137160"/>
+            <a:off x="7589520" y="1051560"/>
+            <a:ext cx="137160" cy="137160"/>
           </a:xfrm>
-          <a:prstGeom prst="line">
+          <a:prstGeom prst="rect">
             <a:avLst/>
           </a:prstGeom>
-          <a:noFill/>
-          <a:ln w="12700">
+          <a:solidFill>
+            <a:srgbClr val="FFFFFF"/>
+          </a:solidFill>
+          <a:ln w="6350">
             <a:solidFill>
-              <a:srgbClr val="0C2340"/>
+              <a:srgbClr val="000000"/>
             </a:solidFill>
             <a:prstDash val="solid"/>
           </a:ln>
@@ -1083,90 +1065,14 @@
       </p:sp>
       <p:sp>
         <p:nvSpPr>
-          <p:cNvPr id="9" name="Text 7"/>
+          <p:cNvPr id="8" name="Text 6"/>
           <p:cNvSpPr/>
           <p:nvPr/>
         </p:nvSpPr>
         <p:spPr>
           <a:xfrm>
-            <a:off x="182880" y="1892808"/>
-            <a:ext cx="1280160" cy="411480"/>
-          </a:xfrm>
-          <a:prstGeom prst="rect">
-            <a:avLst/>
-          </a:prstGeom>
-          <a:noFill/>
-          <a:ln/>
-        </p:spPr>
-        <p:txBody>
-          <a:bodyPr wrap="square" lIns="0" tIns="0" rIns="0" bIns="0" rtlCol="0" anchor="b"/>
-          <a:lstStyle/>
-          <a:p>
-            <a:pPr algn="ctr" indent="0" marL="0">
-              <a:buNone/>
-            </a:pPr>
-            <a:r>
-              <a:rPr lang="en-US" sz="850" dirty="0">
-                <a:solidFill>
-                  <a:srgbClr val="404040"/>
-                </a:solidFill>
-                <a:latin typeface="Calibri" pitchFamily="34" charset="0"/>
-                <a:ea typeface="Calibri" pitchFamily="34" charset="-122"/>
-                <a:cs typeface="Calibri" pitchFamily="34" charset="-120"/>
-              </a:rPr>
-              <a:t>National Hydrogen</a:t>
-            </a:r>
-            <a:endParaRPr lang="en-US" sz="850" dirty="0"/>
-          </a:p>
-          <a:p>
-            <a:pPr algn="ctr" indent="0" marL="0">
-              <a:buNone/>
-            </a:pPr>
-            <a:r>
-              <a:rPr lang="en-US" sz="850" dirty="0">
-                <a:solidFill>
-                  <a:srgbClr val="404040"/>
-                </a:solidFill>
-                <a:latin typeface="Calibri" pitchFamily="34" charset="0"/>
-                <a:ea typeface="Calibri" pitchFamily="34" charset="-122"/>
-                <a:cs typeface="Calibri" pitchFamily="34" charset="-120"/>
-              </a:rPr>
-              <a:t>Strategy published</a:t>
-            </a:r>
-            <a:endParaRPr lang="en-US" sz="850" dirty="0"/>
-          </a:p>
-        </p:txBody>
-      </p:sp>
-      <p:sp>
-        <p:nvSpPr>
-          <p:cNvPr id="10" name="Shape 8"/>
-          <p:cNvSpPr/>
-          <p:nvPr/>
-        </p:nvSpPr>
-        <p:spPr>
-          <a:xfrm>
-            <a:off x="2812694" y="2441448"/>
-            <a:ext cx="237744" cy="237744"/>
-          </a:xfrm>
-          <a:prstGeom prst="ellipse">
-            <a:avLst/>
-          </a:prstGeom>
-          <a:solidFill>
-            <a:srgbClr val="0C2340"/>
-          </a:solidFill>
-          <a:ln/>
-        </p:spPr>
-      </p:sp>
-      <p:sp>
-        <p:nvSpPr>
-          <p:cNvPr id="11" name="Text 9"/>
-          <p:cNvSpPr/>
-          <p:nvPr/>
-        </p:nvSpPr>
-        <p:spPr>
-          <a:xfrm>
-            <a:off x="2812694" y="2441448"/>
-            <a:ext cx="237744" cy="237744"/>
+            <a:off x="7772400" y="1051560"/>
+            <a:ext cx="1097280" cy="137160"/>
           </a:xfrm>
           <a:prstGeom prst="rect">
             <a:avLst/>
@@ -1178,654 +1084,46 @@
           <a:bodyPr wrap="square" lIns="0" tIns="0" rIns="0" bIns="0" rtlCol="0" anchor="ctr"/>
           <a:lstStyle/>
           <a:p>
-            <a:pPr algn="ctr" indent="0" marL="0">
+            <a:pPr indent="0" marL="0">
               <a:buNone/>
             </a:pPr>
             <a:r>
-              <a:rPr lang="en-US" sz="750" b="1" dirty="0">
+              <a:rPr lang="en-US" sz="700" dirty="0">
                 <a:solidFill>
-                  <a:srgbClr val="FFFFFF"/>
+                  <a:srgbClr val="333333"/>
                 </a:solidFill>
                 <a:latin typeface="Calibri" pitchFamily="34" charset="0"/>
                 <a:ea typeface="Calibri" pitchFamily="34" charset="-122"/>
                 <a:cs typeface="Calibri" pitchFamily="34" charset="-120"/>
               </a:rPr>
-              <a:t>2022</a:t>
+              <a:t>2nd least-cost option</a:t>
             </a:r>
-            <a:endParaRPr lang="en-US" sz="750" dirty="0"/>
+            <a:endParaRPr lang="en-US" sz="700" dirty="0"/>
           </a:p>
         </p:txBody>
       </p:sp>
       <p:sp>
         <p:nvSpPr>
-          <p:cNvPr id="12" name="Shape 10"/>
+          <p:cNvPr id="9" name="Shape 7"/>
           <p:cNvSpPr/>
           <p:nvPr/>
         </p:nvSpPr>
         <p:spPr>
           <a:xfrm>
-            <a:off x="2931566" y="2679192"/>
-            <a:ext cx="0" cy="137160"/>
+            <a:off x="457200" y="1325880"/>
+            <a:ext cx="8229600" cy="0"/>
           </a:xfrm>
           <a:prstGeom prst="line">
             <a:avLst/>
           </a:prstGeom>
           <a:noFill/>
-          <a:ln w="12700">
+          <a:ln w="25400">
             <a:solidFill>
-              <a:srgbClr val="0C2340"/>
+              <a:srgbClr val="1B3A5C"/>
             </a:solidFill>
             <a:prstDash val="solid"/>
           </a:ln>
         </p:spPr>
-      </p:sp>
-      <p:sp>
-        <p:nvSpPr>
-          <p:cNvPr id="13" name="Text 11"/>
-          <p:cNvSpPr/>
-          <p:nvPr/>
-        </p:nvSpPr>
-        <p:spPr>
-          <a:xfrm>
-            <a:off x="2291486" y="2816352"/>
-            <a:ext cx="1280160" cy="411480"/>
-          </a:xfrm>
-          <a:prstGeom prst="rect">
-            <a:avLst/>
-          </a:prstGeom>
-          <a:noFill/>
-          <a:ln/>
-        </p:spPr>
-        <p:txBody>
-          <a:bodyPr wrap="square" lIns="0" tIns="0" rIns="0" bIns="0" rtlCol="0" anchor="t"/>
-          <a:lstStyle/>
-          <a:p>
-            <a:pPr algn="ctr" indent="0" marL="0">
-              <a:buNone/>
-            </a:pPr>
-            <a:r>
-              <a:rPr lang="en-US" sz="850" dirty="0">
-                <a:solidFill>
-                  <a:srgbClr val="404040"/>
-                </a:solidFill>
-                <a:latin typeface="Calibri" pitchFamily="34" charset="0"/>
-                <a:ea typeface="Calibri" pitchFamily="34" charset="-122"/>
-                <a:cs typeface="Calibri" pitchFamily="34" charset="-120"/>
-              </a:rPr>
-              <a:t>REPowerEU plan</a:t>
-            </a:r>
-            <a:endParaRPr lang="en-US" sz="850" dirty="0"/>
-          </a:p>
-          <a:p>
-            <a:pPr algn="ctr" indent="0" marL="0">
-              <a:buNone/>
-            </a:pPr>
-            <a:r>
-              <a:rPr lang="en-US" sz="850" dirty="0">
-                <a:solidFill>
-                  <a:srgbClr val="404040"/>
-                </a:solidFill>
-                <a:latin typeface="Calibri" pitchFamily="34" charset="0"/>
-                <a:ea typeface="Calibri" pitchFamily="34" charset="-122"/>
-                <a:cs typeface="Calibri" pitchFamily="34" charset="-120"/>
-              </a:rPr>
-              <a:t>accelerates ambitions</a:t>
-            </a:r>
-            <a:endParaRPr lang="en-US" sz="850" dirty="0"/>
-          </a:p>
-        </p:txBody>
-      </p:sp>
-      <p:sp>
-        <p:nvSpPr>
-          <p:cNvPr id="14" name="Shape 12"/>
-          <p:cNvSpPr/>
-          <p:nvPr/>
-        </p:nvSpPr>
-        <p:spPr>
-          <a:xfrm>
-            <a:off x="4921301" y="2441448"/>
-            <a:ext cx="237744" cy="237744"/>
-          </a:xfrm>
-          <a:prstGeom prst="ellipse">
-            <a:avLst/>
-          </a:prstGeom>
-          <a:solidFill>
-            <a:srgbClr val="0C2340"/>
-          </a:solidFill>
-          <a:ln/>
-        </p:spPr>
-      </p:sp>
-      <p:sp>
-        <p:nvSpPr>
-          <p:cNvPr id="15" name="Text 13"/>
-          <p:cNvSpPr/>
-          <p:nvPr/>
-        </p:nvSpPr>
-        <p:spPr>
-          <a:xfrm>
-            <a:off x="4921301" y="2441448"/>
-            <a:ext cx="237744" cy="237744"/>
-          </a:xfrm>
-          <a:prstGeom prst="rect">
-            <a:avLst/>
-          </a:prstGeom>
-          <a:noFill/>
-          <a:ln/>
-        </p:spPr>
-        <p:txBody>
-          <a:bodyPr wrap="square" lIns="0" tIns="0" rIns="0" bIns="0" rtlCol="0" anchor="ctr"/>
-          <a:lstStyle/>
-          <a:p>
-            <a:pPr algn="ctr" indent="0" marL="0">
-              <a:buNone/>
-            </a:pPr>
-            <a:r>
-              <a:rPr lang="en-US" sz="750" b="1" dirty="0">
-                <a:solidFill>
-                  <a:srgbClr val="FFFFFF"/>
-                </a:solidFill>
-                <a:latin typeface="Calibri" pitchFamily="34" charset="0"/>
-                <a:ea typeface="Calibri" pitchFamily="34" charset="-122"/>
-                <a:cs typeface="Calibri" pitchFamily="34" charset="-120"/>
-              </a:rPr>
-              <a:t>2025</a:t>
-            </a:r>
-            <a:endParaRPr lang="en-US" sz="750" dirty="0"/>
-          </a:p>
-        </p:txBody>
-      </p:sp>
-      <p:sp>
-        <p:nvSpPr>
-          <p:cNvPr id="16" name="Shape 14"/>
-          <p:cNvSpPr/>
-          <p:nvPr/>
-        </p:nvSpPr>
-        <p:spPr>
-          <a:xfrm>
-            <a:off x="5040173" y="2304288"/>
-            <a:ext cx="0" cy="137160"/>
-          </a:xfrm>
-          <a:prstGeom prst="line">
-            <a:avLst/>
-          </a:prstGeom>
-          <a:noFill/>
-          <a:ln w="12700">
-            <a:solidFill>
-              <a:srgbClr val="0C2340"/>
-            </a:solidFill>
-            <a:prstDash val="solid"/>
-          </a:ln>
-        </p:spPr>
-      </p:sp>
-      <p:sp>
-        <p:nvSpPr>
-          <p:cNvPr id="17" name="Text 15"/>
-          <p:cNvSpPr/>
-          <p:nvPr/>
-        </p:nvSpPr>
-        <p:spPr>
-          <a:xfrm>
-            <a:off x="4400093" y="1892808"/>
-            <a:ext cx="1280160" cy="411480"/>
-          </a:xfrm>
-          <a:prstGeom prst="rect">
-            <a:avLst/>
-          </a:prstGeom>
-          <a:noFill/>
-          <a:ln/>
-        </p:spPr>
-        <p:txBody>
-          <a:bodyPr wrap="square" lIns="0" tIns="0" rIns="0" bIns="0" rtlCol="0" anchor="b"/>
-          <a:lstStyle/>
-          <a:p>
-            <a:pPr algn="ctr" indent="0" marL="0">
-              <a:buNone/>
-            </a:pPr>
-            <a:r>
-              <a:rPr lang="en-US" sz="850" dirty="0">
-                <a:solidFill>
-                  <a:srgbClr val="404040"/>
-                </a:solidFill>
-                <a:latin typeface="Calibri" pitchFamily="34" charset="0"/>
-                <a:ea typeface="Calibri" pitchFamily="34" charset="-122"/>
-                <a:cs typeface="Calibri" pitchFamily="34" charset="-120"/>
-              </a:rPr>
-              <a:t>First green H2</a:t>
-            </a:r>
-            <a:endParaRPr lang="en-US" sz="850" dirty="0"/>
-          </a:p>
-          <a:p>
-            <a:pPr algn="ctr" indent="0" marL="0">
-              <a:buNone/>
-            </a:pPr>
-            <a:r>
-              <a:rPr lang="en-US" sz="850" dirty="0">
-                <a:solidFill>
-                  <a:srgbClr val="404040"/>
-                </a:solidFill>
-                <a:latin typeface="Calibri" pitchFamily="34" charset="0"/>
-                <a:ea typeface="Calibri" pitchFamily="34" charset="-122"/>
-                <a:cs typeface="Calibri" pitchFamily="34" charset="-120"/>
-              </a:rPr>
-              <a:t>hubs operational</a:t>
-            </a:r>
-            <a:endParaRPr lang="en-US" sz="850" dirty="0"/>
-          </a:p>
-        </p:txBody>
-      </p:sp>
-      <p:sp>
-        <p:nvSpPr>
-          <p:cNvPr id="18" name="Shape 16"/>
-          <p:cNvSpPr/>
-          <p:nvPr/>
-        </p:nvSpPr>
-        <p:spPr>
-          <a:xfrm>
-            <a:off x="7029907" y="2441448"/>
-            <a:ext cx="237744" cy="237744"/>
-          </a:xfrm>
-          <a:prstGeom prst="ellipse">
-            <a:avLst/>
-          </a:prstGeom>
-          <a:solidFill>
-            <a:srgbClr val="0C2340"/>
-          </a:solidFill>
-          <a:ln/>
-        </p:spPr>
-      </p:sp>
-      <p:sp>
-        <p:nvSpPr>
-          <p:cNvPr id="19" name="Text 17"/>
-          <p:cNvSpPr/>
-          <p:nvPr/>
-        </p:nvSpPr>
-        <p:spPr>
-          <a:xfrm>
-            <a:off x="7029907" y="2441448"/>
-            <a:ext cx="237744" cy="237744"/>
-          </a:xfrm>
-          <a:prstGeom prst="rect">
-            <a:avLst/>
-          </a:prstGeom>
-          <a:noFill/>
-          <a:ln/>
-        </p:spPr>
-        <p:txBody>
-          <a:bodyPr wrap="square" lIns="0" tIns="0" rIns="0" bIns="0" rtlCol="0" anchor="ctr"/>
-          <a:lstStyle/>
-          <a:p>
-            <a:pPr algn="ctr" indent="0" marL="0">
-              <a:buNone/>
-            </a:pPr>
-            <a:r>
-              <a:rPr lang="en-US" sz="750" b="1" dirty="0">
-                <a:solidFill>
-                  <a:srgbClr val="FFFFFF"/>
-                </a:solidFill>
-                <a:latin typeface="Calibri" pitchFamily="34" charset="0"/>
-                <a:ea typeface="Calibri" pitchFamily="34" charset="-122"/>
-                <a:cs typeface="Calibri" pitchFamily="34" charset="-120"/>
-              </a:rPr>
-              <a:t>2028</a:t>
-            </a:r>
-            <a:endParaRPr lang="en-US" sz="750" dirty="0"/>
-          </a:p>
-        </p:txBody>
-      </p:sp>
-      <p:sp>
-        <p:nvSpPr>
-          <p:cNvPr id="20" name="Shape 18"/>
-          <p:cNvSpPr/>
-          <p:nvPr/>
-        </p:nvSpPr>
-        <p:spPr>
-          <a:xfrm>
-            <a:off x="7148779" y="2679192"/>
-            <a:ext cx="0" cy="137160"/>
-          </a:xfrm>
-          <a:prstGeom prst="line">
-            <a:avLst/>
-          </a:prstGeom>
-          <a:noFill/>
-          <a:ln w="12700">
-            <a:solidFill>
-              <a:srgbClr val="0C2340"/>
-            </a:solidFill>
-            <a:prstDash val="solid"/>
-          </a:ln>
-        </p:spPr>
-      </p:sp>
-      <p:sp>
-        <p:nvSpPr>
-          <p:cNvPr id="21" name="Text 19"/>
-          <p:cNvSpPr/>
-          <p:nvPr/>
-        </p:nvSpPr>
-        <p:spPr>
-          <a:xfrm>
-            <a:off x="6508699" y="2816352"/>
-            <a:ext cx="1280160" cy="411480"/>
-          </a:xfrm>
-          <a:prstGeom prst="rect">
-            <a:avLst/>
-          </a:prstGeom>
-          <a:noFill/>
-          <a:ln/>
-        </p:spPr>
-        <p:txBody>
-          <a:bodyPr wrap="square" lIns="0" tIns="0" rIns="0" bIns="0" rtlCol="0" anchor="t"/>
-          <a:lstStyle/>
-          <a:p>
-            <a:pPr algn="ctr" indent="0" marL="0">
-              <a:buNone/>
-            </a:pPr>
-            <a:r>
-              <a:rPr lang="en-US" sz="850" dirty="0">
-                <a:solidFill>
-                  <a:srgbClr val="404040"/>
-                </a:solidFill>
-                <a:latin typeface="Calibri" pitchFamily="34" charset="0"/>
-                <a:ea typeface="Calibri" pitchFamily="34" charset="-122"/>
-                <a:cs typeface="Calibri" pitchFamily="34" charset="-120"/>
-              </a:rPr>
-              <a:t>HyNetwork backbone</a:t>
-            </a:r>
-            <a:endParaRPr lang="en-US" sz="850" dirty="0"/>
-          </a:p>
-          <a:p>
-            <a:pPr algn="ctr" indent="0" marL="0">
-              <a:buNone/>
-            </a:pPr>
-            <a:r>
-              <a:rPr lang="en-US" sz="850" dirty="0">
-                <a:solidFill>
-                  <a:srgbClr val="404040"/>
-                </a:solidFill>
-                <a:latin typeface="Calibri" pitchFamily="34" charset="0"/>
-                <a:ea typeface="Calibri" pitchFamily="34" charset="-122"/>
-                <a:cs typeface="Calibri" pitchFamily="34" charset="-120"/>
-              </a:rPr>
-              <a:t>pipeline live</a:t>
-            </a:r>
-            <a:endParaRPr lang="en-US" sz="850" dirty="0"/>
-          </a:p>
-        </p:txBody>
-      </p:sp>
-      <p:sp>
-        <p:nvSpPr>
-          <p:cNvPr id="22" name="Shape 20"/>
-          <p:cNvSpPr/>
-          <p:nvPr/>
-        </p:nvSpPr>
-        <p:spPr>
-          <a:xfrm>
-            <a:off x="9138514" y="2441448"/>
-            <a:ext cx="237744" cy="237744"/>
-          </a:xfrm>
-          <a:prstGeom prst="ellipse">
-            <a:avLst/>
-          </a:prstGeom>
-          <a:solidFill>
-            <a:srgbClr val="0C2340"/>
-          </a:solidFill>
-          <a:ln/>
-        </p:spPr>
-      </p:sp>
-      <p:sp>
-        <p:nvSpPr>
-          <p:cNvPr id="23" name="Text 21"/>
-          <p:cNvSpPr/>
-          <p:nvPr/>
-        </p:nvSpPr>
-        <p:spPr>
-          <a:xfrm>
-            <a:off x="9138514" y="2441448"/>
-            <a:ext cx="237744" cy="237744"/>
-          </a:xfrm>
-          <a:prstGeom prst="rect">
-            <a:avLst/>
-          </a:prstGeom>
-          <a:noFill/>
-          <a:ln/>
-        </p:spPr>
-        <p:txBody>
-          <a:bodyPr wrap="square" lIns="0" tIns="0" rIns="0" bIns="0" rtlCol="0" anchor="ctr"/>
-          <a:lstStyle/>
-          <a:p>
-            <a:pPr algn="ctr" indent="0" marL="0">
-              <a:buNone/>
-            </a:pPr>
-            <a:r>
-              <a:rPr lang="en-US" sz="750" b="1" dirty="0">
-                <a:solidFill>
-                  <a:srgbClr val="FFFFFF"/>
-                </a:solidFill>
-                <a:latin typeface="Calibri" pitchFamily="34" charset="0"/>
-                <a:ea typeface="Calibri" pitchFamily="34" charset="-122"/>
-                <a:cs typeface="Calibri" pitchFamily="34" charset="-120"/>
-              </a:rPr>
-              <a:t>2030</a:t>
-            </a:r>
-            <a:endParaRPr lang="en-US" sz="750" dirty="0"/>
-          </a:p>
-        </p:txBody>
-      </p:sp>
-      <p:sp>
-        <p:nvSpPr>
-          <p:cNvPr id="24" name="Shape 22"/>
-          <p:cNvSpPr/>
-          <p:nvPr/>
-        </p:nvSpPr>
-        <p:spPr>
-          <a:xfrm>
-            <a:off x="9257386" y="2304288"/>
-            <a:ext cx="0" cy="137160"/>
-          </a:xfrm>
-          <a:prstGeom prst="line">
-            <a:avLst/>
-          </a:prstGeom>
-          <a:noFill/>
-          <a:ln w="12700">
-            <a:solidFill>
-              <a:srgbClr val="0C2340"/>
-            </a:solidFill>
-            <a:prstDash val="solid"/>
-          </a:ln>
-        </p:spPr>
-      </p:sp>
-      <p:sp>
-        <p:nvSpPr>
-          <p:cNvPr id="25" name="Text 23"/>
-          <p:cNvSpPr/>
-          <p:nvPr/>
-        </p:nvSpPr>
-        <p:spPr>
-          <a:xfrm>
-            <a:off x="8617306" y="1892808"/>
-            <a:ext cx="1280160" cy="411480"/>
-          </a:xfrm>
-          <a:prstGeom prst="rect">
-            <a:avLst/>
-          </a:prstGeom>
-          <a:noFill/>
-          <a:ln/>
-        </p:spPr>
-        <p:txBody>
-          <a:bodyPr wrap="square" lIns="0" tIns="0" rIns="0" bIns="0" rtlCol="0" anchor="b"/>
-          <a:lstStyle/>
-          <a:p>
-            <a:pPr algn="ctr" indent="0" marL="0">
-              <a:buNone/>
-            </a:pPr>
-            <a:r>
-              <a:rPr lang="en-US" sz="850" dirty="0">
-                <a:solidFill>
-                  <a:srgbClr val="404040"/>
-                </a:solidFill>
-                <a:latin typeface="Calibri" pitchFamily="34" charset="0"/>
-                <a:ea typeface="Calibri" pitchFamily="34" charset="-122"/>
-                <a:cs typeface="Calibri" pitchFamily="34" charset="-120"/>
-              </a:rPr>
-              <a:t>Scale-up phase</a:t>
-            </a:r>
-            <a:endParaRPr lang="en-US" sz="850" dirty="0"/>
-          </a:p>
-          <a:p>
-            <a:pPr algn="ctr" indent="0" marL="0">
-              <a:buNone/>
-            </a:pPr>
-            <a:r>
-              <a:rPr lang="en-US" sz="850" dirty="0">
-                <a:solidFill>
-                  <a:srgbClr val="404040"/>
-                </a:solidFill>
-                <a:latin typeface="Calibri" pitchFamily="34" charset="0"/>
-                <a:ea typeface="Calibri" pitchFamily="34" charset="-122"/>
-                <a:cs typeface="Calibri" pitchFamily="34" charset="-120"/>
-              </a:rPr>
-              <a:t>complete</a:t>
-            </a:r>
-            <a:endParaRPr lang="en-US" sz="850" dirty="0"/>
-          </a:p>
-        </p:txBody>
-      </p:sp>
-      <p:sp>
-        <p:nvSpPr>
-          <p:cNvPr id="26" name="Shape 24"/>
-          <p:cNvSpPr/>
-          <p:nvPr/>
-        </p:nvSpPr>
-        <p:spPr>
-          <a:xfrm>
-            <a:off x="11247120" y="2441448"/>
-            <a:ext cx="237744" cy="237744"/>
-          </a:xfrm>
-          <a:prstGeom prst="ellipse">
-            <a:avLst/>
-          </a:prstGeom>
-          <a:solidFill>
-            <a:srgbClr val="0C2340"/>
-          </a:solidFill>
-          <a:ln/>
-        </p:spPr>
-      </p:sp>
-      <p:sp>
-        <p:nvSpPr>
-          <p:cNvPr id="27" name="Text 25"/>
-          <p:cNvSpPr/>
-          <p:nvPr/>
-        </p:nvSpPr>
-        <p:spPr>
-          <a:xfrm>
-            <a:off x="11247120" y="2441448"/>
-            <a:ext cx="237744" cy="237744"/>
-          </a:xfrm>
-          <a:prstGeom prst="rect">
-            <a:avLst/>
-          </a:prstGeom>
-          <a:noFill/>
-          <a:ln/>
-        </p:spPr>
-        <p:txBody>
-          <a:bodyPr wrap="square" lIns="0" tIns="0" rIns="0" bIns="0" rtlCol="0" anchor="ctr"/>
-          <a:lstStyle/>
-          <a:p>
-            <a:pPr algn="ctr" indent="0" marL="0">
-              <a:buNone/>
-            </a:pPr>
-            <a:r>
-              <a:rPr lang="en-US" sz="750" b="1" dirty="0">
-                <a:solidFill>
-                  <a:srgbClr val="FFFFFF"/>
-                </a:solidFill>
-                <a:latin typeface="Calibri" pitchFamily="34" charset="0"/>
-                <a:ea typeface="Calibri" pitchFamily="34" charset="-122"/>
-                <a:cs typeface="Calibri" pitchFamily="34" charset="-120"/>
-              </a:rPr>
-              <a:t>2035</a:t>
-            </a:r>
-            <a:endParaRPr lang="en-US" sz="750" dirty="0"/>
-          </a:p>
-        </p:txBody>
-      </p:sp>
-      <p:sp>
-        <p:nvSpPr>
-          <p:cNvPr id="28" name="Shape 26"/>
-          <p:cNvSpPr/>
-          <p:nvPr/>
-        </p:nvSpPr>
-        <p:spPr>
-          <a:xfrm>
-            <a:off x="11365992" y="2679192"/>
-            <a:ext cx="0" cy="137160"/>
-          </a:xfrm>
-          <a:prstGeom prst="line">
-            <a:avLst/>
-          </a:prstGeom>
-          <a:noFill/>
-          <a:ln w="12700">
-            <a:solidFill>
-              <a:srgbClr val="0C2340"/>
-            </a:solidFill>
-            <a:prstDash val="solid"/>
-          </a:ln>
-        </p:spPr>
-      </p:sp>
-      <p:sp>
-        <p:nvSpPr>
-          <p:cNvPr id="29" name="Text 27"/>
-          <p:cNvSpPr/>
-          <p:nvPr/>
-        </p:nvSpPr>
-        <p:spPr>
-          <a:xfrm>
-            <a:off x="10725912" y="2816352"/>
-            <a:ext cx="1280160" cy="411480"/>
-          </a:xfrm>
-          <a:prstGeom prst="rect">
-            <a:avLst/>
-          </a:prstGeom>
-          <a:noFill/>
-          <a:ln/>
-        </p:spPr>
-        <p:txBody>
-          <a:bodyPr wrap="square" lIns="0" tIns="0" rIns="0" bIns="0" rtlCol="0" anchor="t"/>
-          <a:lstStyle/>
-          <a:p>
-            <a:pPr algn="ctr" indent="0" marL="0">
-              <a:buNone/>
-            </a:pPr>
-            <a:r>
-              <a:rPr lang="en-US" sz="850" dirty="0">
-                <a:solidFill>
-                  <a:srgbClr val="404040"/>
-                </a:solidFill>
-                <a:latin typeface="Calibri" pitchFamily="34" charset="0"/>
-                <a:ea typeface="Calibri" pitchFamily="34" charset="-122"/>
-                <a:cs typeface="Calibri" pitchFamily="34" charset="-120"/>
-              </a:rPr>
-              <a:t>EU hydrogen corridor</a:t>
-            </a:r>
-            <a:endParaRPr lang="en-US" sz="850" dirty="0"/>
-          </a:p>
-          <a:p>
-            <a:pPr algn="ctr" indent="0" marL="0">
-              <a:buNone/>
-            </a:pPr>
-            <a:r>
-              <a:rPr lang="en-US" sz="850" dirty="0">
-                <a:solidFill>
-                  <a:srgbClr val="404040"/>
-                </a:solidFill>
-                <a:latin typeface="Calibri" pitchFamily="34" charset="0"/>
-                <a:ea typeface="Calibri" pitchFamily="34" charset="-122"/>
-                <a:cs typeface="Calibri" pitchFamily="34" charset="-120"/>
-              </a:rPr>
-              <a:t>integration</a:t>
-            </a:r>
-            <a:endParaRPr lang="en-US" sz="850" dirty="0"/>
-          </a:p>
-        </p:txBody>
       </p:sp>
       <p:graphicFrame>
         <p:nvGraphicFramePr>
@@ -1842,85 +1140,74 @@
           </p:nvPr>
         </p:nvGraphicFramePr>
         <p:xfrm>
-          <a:off x="457200" y="3383280"/>
-          <a:ext cx="11274552" cy="914400"/>
+          <a:off x="457200" y="1335024"/>
+          <a:ext cx="8229600" cy="1645920"/>
         </p:xfrm>
         <a:graphic>
           <a:graphicData uri="http://schemas.openxmlformats.org/drawingml/2006/table">
             <a:tbl>
               <a:tblPr/>
               <a:tblGrid>
-                <a:gridCol w="2587752"/>
-                <a:gridCol w="1737360"/>
-                <a:gridCol w="1737360"/>
-                <a:gridCol w="1737360"/>
-                <a:gridCol w="1737360"/>
-                <a:gridCol w="1737360"/>
+                <a:gridCol w="640080"/>
+                <a:gridCol w="1005840"/>
+                <a:gridCol w="1371600"/>
+                <a:gridCol w="1097280"/>
+                <a:gridCol w="1005840"/>
+                <a:gridCol w="1005840"/>
+                <a:gridCol w="1188720"/>
               </a:tblGrid>
-              <a:tr h="274320">
+              <a:tr h="502920">
                 <a:tc>
                   <a:txBody>
                     <a:bodyPr/>
                     <a:lstStyle/>
                     <a:p>
-                      <a:pPr algn="l" indent="0" marL="0">
-                        <a:buNone/>
-                      </a:pPr>
-                      <a:r>
-                        <a:rPr lang="en-US" sz="850" b="1" dirty="0">
-                          <a:solidFill>
-                            <a:srgbClr val="0C2340"/>
-                          </a:solidFill>
-                          <a:latin typeface="Calibri" pitchFamily="34" charset="0"/>
-                          <a:ea typeface="Calibri" pitchFamily="34" charset="-122"/>
-                          <a:cs typeface="Calibri" pitchFamily="34" charset="-120"/>
-                        </a:rPr>
-                        <a:t>Metric</a:t>
-                      </a:r>
-                      <a:endParaRPr lang="en-US" sz="850" dirty="0">
-                        <a:latin typeface="Calibri" charset="0"/>
-                        <a:ea typeface="Calibri" charset="0"/>
-                        <a:cs typeface="Calibri" charset="0"/>
-                      </a:endParaRPr>
+                      <a:pPr indent="0" marL="0">
+                        <a:buNone/>
+                      </a:pPr>
+                      <a:endParaRPr lang="en-US" sz="900" dirty="0"/>
                     </a:p>
                   </a:txBody>
-                  <a:tcPr marL="50800" marR="50800" marT="25400" marB="25400" anchor="ctr">
-                    <a:lnL w="0" cap="flat" cmpd="sng" algn="ctr">
-                      <a:solidFill>
-                        <a:srgbClr val="FFFFFF"/>
+                  <a:tcPr marL="91440" marR="91440" marT="45720" marB="45720">
+                    <a:lnL w="6350" cap="flat" cmpd="sng" algn="ctr">
+                      <a:solidFill>
+                        <a:srgbClr val="D0D0D0"/>
                       </a:solidFill>
                       <a:prstDash val="solid"/>
                       <a:round/>
                       <a:headEnd type="none" w="med" len="med"/>
                       <a:tailEnd type="none" w="med" len="med"/>
                     </a:lnL>
-                    <a:lnR w="0" cap="flat" cmpd="sng" algn="ctr">
-                      <a:solidFill>
-                        <a:srgbClr val="FFFFFF"/>
+                    <a:lnR w="6350" cap="flat" cmpd="sng" algn="ctr">
+                      <a:solidFill>
+                        <a:srgbClr val="D0D0D0"/>
                       </a:solidFill>
                       <a:prstDash val="solid"/>
                       <a:round/>
                       <a:headEnd type="none" w="med" len="med"/>
                       <a:tailEnd type="none" w="med" len="med"/>
                     </a:lnR>
-                    <a:lnT w="19050" cap="flat" cmpd="sng" algn="ctr">
-                      <a:solidFill>
-                        <a:srgbClr val="0C2340"/>
+                    <a:lnT w="6350" cap="flat" cmpd="sng" algn="ctr">
+                      <a:solidFill>
+                        <a:srgbClr val="D0D0D0"/>
                       </a:solidFill>
                       <a:prstDash val="solid"/>
                       <a:round/>
                       <a:headEnd type="none" w="med" len="med"/>
                       <a:tailEnd type="none" w="med" len="med"/>
                     </a:lnT>
-                    <a:lnB w="19050" cap="flat" cmpd="sng" algn="ctr">
-                      <a:solidFill>
-                        <a:srgbClr val="0C2340"/>
+                    <a:lnB w="6350" cap="flat" cmpd="sng" algn="ctr">
+                      <a:solidFill>
+                        <a:srgbClr val="D0D0D0"/>
                       </a:solidFill>
                       <a:prstDash val="solid"/>
                       <a:round/>
                       <a:headEnd type="none" w="med" len="med"/>
                       <a:tailEnd type="none" w="med" len="med"/>
                     </a:lnB>
+                    <a:solidFill>
+                      <a:srgbClr val="FFFFFF"/>
+                    </a:solidFill>
                   </a:tcPr>
                 </a:tc>
                 <a:tc>
@@ -1932,60 +1219,105 @@
                         <a:buNone/>
                       </a:pPr>
                       <a:r>
-                        <a:rPr lang="en-US" sz="850" b="1" dirty="0">
+                        <a:rPr lang="en-US" sz="900" b="1" dirty="0">
                           <a:solidFill>
-                            <a:srgbClr val="0C2340"/>
+                            <a:srgbClr val="000000"/>
                           </a:solidFill>
                           <a:latin typeface="Calibri" pitchFamily="34" charset="0"/>
                           <a:ea typeface="Calibri" pitchFamily="34" charset="-122"/>
                           <a:cs typeface="Calibri" pitchFamily="34" charset="-120"/>
                         </a:rPr>
-                        <a:t>2020</a:t>
+                        <a:t>Global H2</a:t>
                       </a:r>
-                      <a:endParaRPr lang="en-US" sz="850" dirty="0">
+                      <a:endParaRPr lang="en-US" sz="900" dirty="0">
                         <a:latin typeface="Calibri" charset="0"/>
                         <a:ea typeface="Calibri" charset="0"/>
                         <a:cs typeface="Calibri" charset="0"/>
                       </a:endParaRPr>
                     </a:p>
+                    <a:p>
+                      <a:pPr algn="ctr" indent="0" marL="0">
+                        <a:buNone/>
+                      </a:pPr>
+                      <a:r>
+                        <a:rPr lang="en-US" sz="900" b="1" dirty="0">
+                          <a:solidFill>
+                            <a:srgbClr val="000000"/>
+                          </a:solidFill>
+                          <a:latin typeface="Calibri" pitchFamily="34" charset="0"/>
+                          <a:ea typeface="Calibri" pitchFamily="34" charset="-122"/>
+                          <a:cs typeface="Calibri" pitchFamily="34" charset="-120"/>
+                        </a:rPr>
+                        <a:t>demand</a:t>
+                      </a:r>
+                      <a:endParaRPr lang="en-US" sz="900" dirty="0">
+                        <a:latin typeface="Calibri" charset="0"/>
+                        <a:ea typeface="Calibri" charset="0"/>
+                        <a:cs typeface="Calibri" charset="0"/>
+                      </a:endParaRPr>
+                    </a:p>
+                    <a:p>
+                      <a:pPr algn="ctr" indent="0" marL="0">
+                        <a:buNone/>
+                      </a:pPr>
+                      <a:r>
+                        <a:rPr lang="en-US" sz="900" b="1" dirty="0">
+                          <a:solidFill>
+                            <a:srgbClr val="000000"/>
+                          </a:solidFill>
+                          <a:latin typeface="Calibri" pitchFamily="34" charset="0"/>
+                          <a:ea typeface="Calibri" pitchFamily="34" charset="-122"/>
+                          <a:cs typeface="Calibri" pitchFamily="34" charset="-120"/>
+                        </a:rPr>
+                        <a:t>Mt p.a.</a:t>
+                      </a:r>
+                      <a:endParaRPr lang="en-US" sz="900" dirty="0">
+                        <a:latin typeface="Calibri" charset="0"/>
+                        <a:ea typeface="Calibri" charset="0"/>
+                        <a:cs typeface="Calibri" charset="0"/>
+                      </a:endParaRPr>
+                    </a:p>
                   </a:txBody>
-                  <a:tcPr marL="50800" marR="50800" marT="25400" marB="25400" anchor="ctr">
-                    <a:lnL w="0" cap="flat" cmpd="sng" algn="ctr">
-                      <a:solidFill>
-                        <a:srgbClr val="FFFFFF"/>
+                  <a:tcPr marL="91440" marR="91440" marT="45720" marB="45720" anchor="ctr">
+                    <a:lnL w="6350" cap="flat" cmpd="sng" algn="ctr">
+                      <a:solidFill>
+                        <a:srgbClr val="D0D0D0"/>
                       </a:solidFill>
                       <a:prstDash val="solid"/>
                       <a:round/>
                       <a:headEnd type="none" w="med" len="med"/>
                       <a:tailEnd type="none" w="med" len="med"/>
                     </a:lnL>
-                    <a:lnR w="0" cap="flat" cmpd="sng" algn="ctr">
-                      <a:solidFill>
-                        <a:srgbClr val="FFFFFF"/>
+                    <a:lnR w="6350" cap="flat" cmpd="sng" algn="ctr">
+                      <a:solidFill>
+                        <a:srgbClr val="D0D0D0"/>
                       </a:solidFill>
                       <a:prstDash val="solid"/>
                       <a:round/>
                       <a:headEnd type="none" w="med" len="med"/>
                       <a:tailEnd type="none" w="med" len="med"/>
                     </a:lnR>
-                    <a:lnT w="19050" cap="flat" cmpd="sng" algn="ctr">
-                      <a:solidFill>
-                        <a:srgbClr val="0C2340"/>
+                    <a:lnT w="6350" cap="flat" cmpd="sng" algn="ctr">
+                      <a:solidFill>
+                        <a:srgbClr val="D0D0D0"/>
                       </a:solidFill>
                       <a:prstDash val="solid"/>
                       <a:round/>
                       <a:headEnd type="none" w="med" len="med"/>
                       <a:tailEnd type="none" w="med" len="med"/>
                     </a:lnT>
-                    <a:lnB w="19050" cap="flat" cmpd="sng" algn="ctr">
-                      <a:solidFill>
-                        <a:srgbClr val="0C2340"/>
+                    <a:lnB w="6350" cap="flat" cmpd="sng" algn="ctr">
+                      <a:solidFill>
+                        <a:srgbClr val="D0D0D0"/>
                       </a:solidFill>
                       <a:prstDash val="solid"/>
                       <a:round/>
                       <a:headEnd type="none" w="med" len="med"/>
                       <a:tailEnd type="none" w="med" len="med"/>
                     </a:lnB>
+                    <a:solidFill>
+                      <a:srgbClr val="FFFFFF"/>
+                    </a:solidFill>
                   </a:tcPr>
                 </a:tc>
                 <a:tc>
@@ -1997,60 +1329,105 @@
                         <a:buNone/>
                       </a:pPr>
                       <a:r>
-                        <a:rPr lang="en-US" sz="850" b="1" dirty="0">
+                        <a:rPr lang="en-US" sz="900" b="1" dirty="0">
                           <a:solidFill>
-                            <a:srgbClr val="0C2340"/>
+                            <a:srgbClr val="000000"/>
                           </a:solidFill>
                           <a:latin typeface="Calibri" pitchFamily="34" charset="0"/>
                           <a:ea typeface="Calibri" pitchFamily="34" charset="-122"/>
                           <a:cs typeface="Calibri" pitchFamily="34" charset="-120"/>
                         </a:rPr>
-                        <a:t>2025</a:t>
+                        <a:t>Thereof</a:t>
                       </a:r>
-                      <a:endParaRPr lang="en-US" sz="850" dirty="0">
+                      <a:endParaRPr lang="en-US" sz="900" dirty="0">
                         <a:latin typeface="Calibri" charset="0"/>
                         <a:ea typeface="Calibri" charset="0"/>
                         <a:cs typeface="Calibri" charset="0"/>
                       </a:endParaRPr>
                     </a:p>
+                    <a:p>
+                      <a:pPr algn="ctr" indent="0" marL="0">
+                        <a:buNone/>
+                      </a:pPr>
+                      <a:r>
+                        <a:rPr lang="en-US" sz="900" b="1" dirty="0">
+                          <a:solidFill>
+                            <a:srgbClr val="000000"/>
+                          </a:solidFill>
+                          <a:latin typeface="Calibri" pitchFamily="34" charset="0"/>
+                          <a:ea typeface="Calibri" pitchFamily="34" charset="-122"/>
+                          <a:cs typeface="Calibri" pitchFamily="34" charset="-120"/>
+                        </a:rPr>
+                        <a:t>Grey H2</a:t>
+                      </a:r>
+                      <a:endParaRPr lang="en-US" sz="900" dirty="0">
+                        <a:latin typeface="Calibri" charset="0"/>
+                        <a:ea typeface="Calibri" charset="0"/>
+                        <a:cs typeface="Calibri" charset="0"/>
+                      </a:endParaRPr>
+                    </a:p>
+                    <a:p>
+                      <a:pPr algn="ctr" indent="0" marL="0">
+                        <a:buNone/>
+                      </a:pPr>
+                      <a:r>
+                        <a:rPr lang="en-US" sz="900" b="1" dirty="0">
+                          <a:solidFill>
+                            <a:srgbClr val="000000"/>
+                          </a:solidFill>
+                          <a:latin typeface="Calibri" pitchFamily="34" charset="0"/>
+                          <a:ea typeface="Calibri" pitchFamily="34" charset="-122"/>
+                          <a:cs typeface="Calibri" pitchFamily="34" charset="-120"/>
+                        </a:rPr>
+                        <a:t>Mt p.a. (Share %)</a:t>
+                      </a:r>
+                      <a:endParaRPr lang="en-US" sz="900" dirty="0">
+                        <a:latin typeface="Calibri" charset="0"/>
+                        <a:ea typeface="Calibri" charset="0"/>
+                        <a:cs typeface="Calibri" charset="0"/>
+                      </a:endParaRPr>
+                    </a:p>
                   </a:txBody>
-                  <a:tcPr marL="50800" marR="50800" marT="25400" marB="25400" anchor="ctr">
-                    <a:lnL w="0" cap="flat" cmpd="sng" algn="ctr">
-                      <a:solidFill>
-                        <a:srgbClr val="FFFFFF"/>
+                  <a:tcPr marL="91440" marR="91440" marT="45720" marB="45720" anchor="ctr">
+                    <a:lnL w="6350" cap="flat" cmpd="sng" algn="ctr">
+                      <a:solidFill>
+                        <a:srgbClr val="D0D0D0"/>
                       </a:solidFill>
                       <a:prstDash val="solid"/>
                       <a:round/>
                       <a:headEnd type="none" w="med" len="med"/>
                       <a:tailEnd type="none" w="med" len="med"/>
                     </a:lnL>
-                    <a:lnR w="0" cap="flat" cmpd="sng" algn="ctr">
-                      <a:solidFill>
-                        <a:srgbClr val="FFFFFF"/>
+                    <a:lnR w="6350" cap="flat" cmpd="sng" algn="ctr">
+                      <a:solidFill>
+                        <a:srgbClr val="D0D0D0"/>
                       </a:solidFill>
                       <a:prstDash val="solid"/>
                       <a:round/>
                       <a:headEnd type="none" w="med" len="med"/>
                       <a:tailEnd type="none" w="med" len="med"/>
                     </a:lnR>
-                    <a:lnT w="19050" cap="flat" cmpd="sng" algn="ctr">
-                      <a:solidFill>
-                        <a:srgbClr val="0C2340"/>
+                    <a:lnT w="6350" cap="flat" cmpd="sng" algn="ctr">
+                      <a:solidFill>
+                        <a:srgbClr val="D0D0D0"/>
                       </a:solidFill>
                       <a:prstDash val="solid"/>
                       <a:round/>
                       <a:headEnd type="none" w="med" len="med"/>
                       <a:tailEnd type="none" w="med" len="med"/>
                     </a:lnT>
-                    <a:lnB w="19050" cap="flat" cmpd="sng" algn="ctr">
-                      <a:solidFill>
-                        <a:srgbClr val="0C2340"/>
+                    <a:lnB w="6350" cap="flat" cmpd="sng" algn="ctr">
+                      <a:solidFill>
+                        <a:srgbClr val="D0D0D0"/>
                       </a:solidFill>
                       <a:prstDash val="solid"/>
                       <a:round/>
                       <a:headEnd type="none" w="med" len="med"/>
                       <a:tailEnd type="none" w="med" len="med"/>
                     </a:lnB>
+                    <a:solidFill>
+                      <a:srgbClr val="FFFFFF"/>
+                    </a:solidFill>
                   </a:tcPr>
                 </a:tc>
                 <a:tc>
@@ -2062,60 +1439,105 @@
                         <a:buNone/>
                       </a:pPr>
                       <a:r>
-                        <a:rPr lang="en-US" sz="850" b="1" dirty="0">
+                        <a:rPr lang="en-US" sz="900" b="1" dirty="0">
                           <a:solidFill>
-                            <a:srgbClr val="0C2340"/>
+                            <a:srgbClr val="000000"/>
                           </a:solidFill>
                           <a:latin typeface="Calibri" pitchFamily="34" charset="0"/>
                           <a:ea typeface="Calibri" pitchFamily="34" charset="-122"/>
                           <a:cs typeface="Calibri" pitchFamily="34" charset="-120"/>
                         </a:rPr>
-                        <a:t>2028</a:t>
+                        <a:t>Thereof</a:t>
                       </a:r>
-                      <a:endParaRPr lang="en-US" sz="850" dirty="0">
+                      <a:endParaRPr lang="en-US" sz="900" dirty="0">
                         <a:latin typeface="Calibri" charset="0"/>
                         <a:ea typeface="Calibri" charset="0"/>
                         <a:cs typeface="Calibri" charset="0"/>
                       </a:endParaRPr>
                     </a:p>
+                    <a:p>
+                      <a:pPr algn="ctr" indent="0" marL="0">
+                        <a:buNone/>
+                      </a:pPr>
+                      <a:r>
+                        <a:rPr lang="en-US" sz="900" b="1" dirty="0">
+                          <a:solidFill>
+                            <a:srgbClr val="000000"/>
+                          </a:solidFill>
+                          <a:latin typeface="Calibri" pitchFamily="34" charset="0"/>
+                          <a:ea typeface="Calibri" pitchFamily="34" charset="-122"/>
+                          <a:cs typeface="Calibri" pitchFamily="34" charset="-120"/>
+                        </a:rPr>
+                        <a:t>Blue+Green H2</a:t>
+                      </a:r>
+                      <a:endParaRPr lang="en-US" sz="900" dirty="0">
+                        <a:latin typeface="Calibri" charset="0"/>
+                        <a:ea typeface="Calibri" charset="0"/>
+                        <a:cs typeface="Calibri" charset="0"/>
+                      </a:endParaRPr>
+                    </a:p>
+                    <a:p>
+                      <a:pPr algn="ctr" indent="0" marL="0">
+                        <a:buNone/>
+                      </a:pPr>
+                      <a:r>
+                        <a:rPr lang="en-US" sz="900" b="1" dirty="0">
+                          <a:solidFill>
+                            <a:srgbClr val="000000"/>
+                          </a:solidFill>
+                          <a:latin typeface="Calibri" pitchFamily="34" charset="0"/>
+                          <a:ea typeface="Calibri" pitchFamily="34" charset="-122"/>
+                          <a:cs typeface="Calibri" pitchFamily="34" charset="-120"/>
+                        </a:rPr>
+                        <a:t>Mt p.a.</a:t>
+                      </a:r>
+                      <a:endParaRPr lang="en-US" sz="900" dirty="0">
+                        <a:latin typeface="Calibri" charset="0"/>
+                        <a:ea typeface="Calibri" charset="0"/>
+                        <a:cs typeface="Calibri" charset="0"/>
+                      </a:endParaRPr>
+                    </a:p>
                   </a:txBody>
-                  <a:tcPr marL="50800" marR="50800" marT="25400" marB="25400" anchor="ctr">
-                    <a:lnL w="0" cap="flat" cmpd="sng" algn="ctr">
-                      <a:solidFill>
-                        <a:srgbClr val="FFFFFF"/>
+                  <a:tcPr marL="91440" marR="91440" marT="45720" marB="45720" anchor="ctr">
+                    <a:lnL w="6350" cap="flat" cmpd="sng" algn="ctr">
+                      <a:solidFill>
+                        <a:srgbClr val="D0D0D0"/>
                       </a:solidFill>
                       <a:prstDash val="solid"/>
                       <a:round/>
                       <a:headEnd type="none" w="med" len="med"/>
                       <a:tailEnd type="none" w="med" len="med"/>
                     </a:lnL>
-                    <a:lnR w="0" cap="flat" cmpd="sng" algn="ctr">
-                      <a:solidFill>
-                        <a:srgbClr val="FFFFFF"/>
+                    <a:lnR w="6350" cap="flat" cmpd="sng" algn="ctr">
+                      <a:solidFill>
+                        <a:srgbClr val="D0D0D0"/>
                       </a:solidFill>
                       <a:prstDash val="solid"/>
                       <a:round/>
                       <a:headEnd type="none" w="med" len="med"/>
                       <a:tailEnd type="none" w="med" len="med"/>
                     </a:lnR>
-                    <a:lnT w="19050" cap="flat" cmpd="sng" algn="ctr">
-                      <a:solidFill>
-                        <a:srgbClr val="0C2340"/>
+                    <a:lnT w="6350" cap="flat" cmpd="sng" algn="ctr">
+                      <a:solidFill>
+                        <a:srgbClr val="D0D0D0"/>
                       </a:solidFill>
                       <a:prstDash val="solid"/>
                       <a:round/>
                       <a:headEnd type="none" w="med" len="med"/>
                       <a:tailEnd type="none" w="med" len="med"/>
                     </a:lnT>
-                    <a:lnB w="19050" cap="flat" cmpd="sng" algn="ctr">
-                      <a:solidFill>
-                        <a:srgbClr val="0C2340"/>
+                    <a:lnB w="6350" cap="flat" cmpd="sng" algn="ctr">
+                      <a:solidFill>
+                        <a:srgbClr val="D0D0D0"/>
                       </a:solidFill>
                       <a:prstDash val="solid"/>
                       <a:round/>
                       <a:headEnd type="none" w="med" len="med"/>
                       <a:tailEnd type="none" w="med" len="med"/>
                     </a:lnB>
+                    <a:solidFill>
+                      <a:srgbClr val="FFFFFF"/>
+                    </a:solidFill>
                   </a:tcPr>
                 </a:tc>
                 <a:tc>
@@ -2127,9 +1549,819 @@
                         <a:buNone/>
                       </a:pPr>
                       <a:r>
-                        <a:rPr lang="en-US" sz="850" b="1" dirty="0">
+                        <a:rPr lang="en-US" sz="900" b="1" dirty="0">
                           <a:solidFill>
-                            <a:srgbClr val="0C2340"/>
+                            <a:srgbClr val="000000"/>
+                          </a:solidFill>
+                          <a:latin typeface="Calibri" pitchFamily="34" charset="0"/>
+                          <a:ea typeface="Calibri" pitchFamily="34" charset="-122"/>
+                          <a:cs typeface="Calibri" pitchFamily="34" charset="-120"/>
+                        </a:rPr>
+                        <a:t>Production cost</a:t>
+                      </a:r>
+                      <a:endParaRPr lang="en-US" sz="900" dirty="0">
+                        <a:latin typeface="Calibri" charset="0"/>
+                        <a:ea typeface="Calibri" charset="0"/>
+                        <a:cs typeface="Calibri" charset="0"/>
+                      </a:endParaRPr>
+                    </a:p>
+                    <a:p>
+                      <a:pPr algn="ctr" indent="0" marL="0">
+                        <a:buNone/>
+                      </a:pPr>
+                      <a:r>
+                        <a:rPr lang="en-US" sz="900" b="1" dirty="0">
+                          <a:solidFill>
+                            <a:srgbClr val="000000"/>
+                          </a:solidFill>
+                          <a:latin typeface="Calibri" pitchFamily="34" charset="0"/>
+                          <a:ea typeface="Calibri" pitchFamily="34" charset="-122"/>
+                          <a:cs typeface="Calibri" pitchFamily="34" charset="-120"/>
+                        </a:rPr>
+                        <a:t>Grey H2</a:t>
+                      </a:r>
+                      <a:endParaRPr lang="en-US" sz="900" dirty="0">
+                        <a:latin typeface="Calibri" charset="0"/>
+                        <a:ea typeface="Calibri" charset="0"/>
+                        <a:cs typeface="Calibri" charset="0"/>
+                      </a:endParaRPr>
+                    </a:p>
+                    <a:p>
+                      <a:pPr algn="ctr" indent="0" marL="0">
+                        <a:buNone/>
+                      </a:pPr>
+                      <a:r>
+                        <a:rPr lang="en-US" sz="900" b="1" dirty="0">
+                          <a:solidFill>
+                            <a:srgbClr val="000000"/>
+                          </a:solidFill>
+                          <a:latin typeface="Calibri" pitchFamily="34" charset="0"/>
+                          <a:ea typeface="Calibri" pitchFamily="34" charset="-122"/>
+                          <a:cs typeface="Calibri" pitchFamily="34" charset="-120"/>
+                        </a:rPr>
+                        <a:t>$/kg</a:t>
+                      </a:r>
+                      <a:endParaRPr lang="en-US" sz="900" dirty="0">
+                        <a:latin typeface="Calibri" charset="0"/>
+                        <a:ea typeface="Calibri" charset="0"/>
+                        <a:cs typeface="Calibri" charset="0"/>
+                      </a:endParaRPr>
+                    </a:p>
+                  </a:txBody>
+                  <a:tcPr marL="91440" marR="91440" marT="45720" marB="45720" anchor="ctr">
+                    <a:lnL w="6350" cap="flat" cmpd="sng" algn="ctr">
+                      <a:solidFill>
+                        <a:srgbClr val="D0D0D0"/>
+                      </a:solidFill>
+                      <a:prstDash val="solid"/>
+                      <a:round/>
+                      <a:headEnd type="none" w="med" len="med"/>
+                      <a:tailEnd type="none" w="med" len="med"/>
+                    </a:lnL>
+                    <a:lnR w="6350" cap="flat" cmpd="sng" algn="ctr">
+                      <a:solidFill>
+                        <a:srgbClr val="D0D0D0"/>
+                      </a:solidFill>
+                      <a:prstDash val="solid"/>
+                      <a:round/>
+                      <a:headEnd type="none" w="med" len="med"/>
+                      <a:tailEnd type="none" w="med" len="med"/>
+                    </a:lnR>
+                    <a:lnT w="6350" cap="flat" cmpd="sng" algn="ctr">
+                      <a:solidFill>
+                        <a:srgbClr val="D0D0D0"/>
+                      </a:solidFill>
+                      <a:prstDash val="solid"/>
+                      <a:round/>
+                      <a:headEnd type="none" w="med" len="med"/>
+                      <a:tailEnd type="none" w="med" len="med"/>
+                    </a:lnT>
+                    <a:lnB w="6350" cap="flat" cmpd="sng" algn="ctr">
+                      <a:solidFill>
+                        <a:srgbClr val="D0D0D0"/>
+                      </a:solidFill>
+                      <a:prstDash val="solid"/>
+                      <a:round/>
+                      <a:headEnd type="none" w="med" len="med"/>
+                      <a:tailEnd type="none" w="med" len="med"/>
+                    </a:lnB>
+                    <a:solidFill>
+                      <a:srgbClr val="FFFFFF"/>
+                    </a:solidFill>
+                  </a:tcPr>
+                </a:tc>
+                <a:tc>
+                  <a:txBody>
+                    <a:bodyPr/>
+                    <a:lstStyle/>
+                    <a:p>
+                      <a:pPr algn="ctr" indent="0" marL="0">
+                        <a:buNone/>
+                      </a:pPr>
+                      <a:r>
+                        <a:rPr lang="en-US" sz="900" b="1" dirty="0">
+                          <a:solidFill>
+                            <a:srgbClr val="000000"/>
+                          </a:solidFill>
+                          <a:latin typeface="Calibri" pitchFamily="34" charset="0"/>
+                          <a:ea typeface="Calibri" pitchFamily="34" charset="-122"/>
+                          <a:cs typeface="Calibri" pitchFamily="34" charset="-120"/>
+                        </a:rPr>
+                        <a:t>Production cost</a:t>
+                      </a:r>
+                      <a:endParaRPr lang="en-US" sz="900" dirty="0">
+                        <a:latin typeface="Calibri" charset="0"/>
+                        <a:ea typeface="Calibri" charset="0"/>
+                        <a:cs typeface="Calibri" charset="0"/>
+                      </a:endParaRPr>
+                    </a:p>
+                    <a:p>
+                      <a:pPr algn="ctr" indent="0" marL="0">
+                        <a:buNone/>
+                      </a:pPr>
+                      <a:r>
+                        <a:rPr lang="en-US" sz="900" b="1" dirty="0">
+                          <a:solidFill>
+                            <a:srgbClr val="000000"/>
+                          </a:solidFill>
+                          <a:latin typeface="Calibri" pitchFamily="34" charset="0"/>
+                          <a:ea typeface="Calibri" pitchFamily="34" charset="-122"/>
+                          <a:cs typeface="Calibri" pitchFamily="34" charset="-120"/>
+                        </a:rPr>
+                        <a:t>Blue H2</a:t>
+                      </a:r>
+                      <a:endParaRPr lang="en-US" sz="900" dirty="0">
+                        <a:latin typeface="Calibri" charset="0"/>
+                        <a:ea typeface="Calibri" charset="0"/>
+                        <a:cs typeface="Calibri" charset="0"/>
+                      </a:endParaRPr>
+                    </a:p>
+                    <a:p>
+                      <a:pPr algn="ctr" indent="0" marL="0">
+                        <a:buNone/>
+                      </a:pPr>
+                      <a:r>
+                        <a:rPr lang="en-US" sz="900" b="1" dirty="0">
+                          <a:solidFill>
+                            <a:srgbClr val="000000"/>
+                          </a:solidFill>
+                          <a:latin typeface="Calibri" pitchFamily="34" charset="0"/>
+                          <a:ea typeface="Calibri" pitchFamily="34" charset="-122"/>
+                          <a:cs typeface="Calibri" pitchFamily="34" charset="-120"/>
+                        </a:rPr>
+                        <a:t>$/kg</a:t>
+                      </a:r>
+                      <a:endParaRPr lang="en-US" sz="900" dirty="0">
+                        <a:latin typeface="Calibri" charset="0"/>
+                        <a:ea typeface="Calibri" charset="0"/>
+                        <a:cs typeface="Calibri" charset="0"/>
+                      </a:endParaRPr>
+                    </a:p>
+                  </a:txBody>
+                  <a:tcPr marL="91440" marR="91440" marT="45720" marB="45720" anchor="ctr">
+                    <a:lnL w="6350" cap="flat" cmpd="sng" algn="ctr">
+                      <a:solidFill>
+                        <a:srgbClr val="D0D0D0"/>
+                      </a:solidFill>
+                      <a:prstDash val="solid"/>
+                      <a:round/>
+                      <a:headEnd type="none" w="med" len="med"/>
+                      <a:tailEnd type="none" w="med" len="med"/>
+                    </a:lnL>
+                    <a:lnR w="6350" cap="flat" cmpd="sng" algn="ctr">
+                      <a:solidFill>
+                        <a:srgbClr val="D0D0D0"/>
+                      </a:solidFill>
+                      <a:prstDash val="solid"/>
+                      <a:round/>
+                      <a:headEnd type="none" w="med" len="med"/>
+                      <a:tailEnd type="none" w="med" len="med"/>
+                    </a:lnR>
+                    <a:lnT w="6350" cap="flat" cmpd="sng" algn="ctr">
+                      <a:solidFill>
+                        <a:srgbClr val="D0D0D0"/>
+                      </a:solidFill>
+                      <a:prstDash val="solid"/>
+                      <a:round/>
+                      <a:headEnd type="none" w="med" len="med"/>
+                      <a:tailEnd type="none" w="med" len="med"/>
+                    </a:lnT>
+                    <a:lnB w="6350" cap="flat" cmpd="sng" algn="ctr">
+                      <a:solidFill>
+                        <a:srgbClr val="D0D0D0"/>
+                      </a:solidFill>
+                      <a:prstDash val="solid"/>
+                      <a:round/>
+                      <a:headEnd type="none" w="med" len="med"/>
+                      <a:tailEnd type="none" w="med" len="med"/>
+                    </a:lnB>
+                    <a:solidFill>
+                      <a:srgbClr val="FFFFFF"/>
+                    </a:solidFill>
+                  </a:tcPr>
+                </a:tc>
+                <a:tc>
+                  <a:txBody>
+                    <a:bodyPr/>
+                    <a:lstStyle/>
+                    <a:p>
+                      <a:pPr algn="ctr" indent="0" marL="0">
+                        <a:buNone/>
+                      </a:pPr>
+                      <a:r>
+                        <a:rPr lang="en-US" sz="900" b="1" dirty="0">
+                          <a:solidFill>
+                            <a:srgbClr val="000000"/>
+                          </a:solidFill>
+                          <a:latin typeface="Calibri" pitchFamily="34" charset="0"/>
+                          <a:ea typeface="Calibri" pitchFamily="34" charset="-122"/>
+                          <a:cs typeface="Calibri" pitchFamily="34" charset="-120"/>
+                        </a:rPr>
+                        <a:t>Production cost</a:t>
+                      </a:r>
+                      <a:endParaRPr lang="en-US" sz="900" dirty="0">
+                        <a:latin typeface="Calibri" charset="0"/>
+                        <a:ea typeface="Calibri" charset="0"/>
+                        <a:cs typeface="Calibri" charset="0"/>
+                      </a:endParaRPr>
+                    </a:p>
+                    <a:p>
+                      <a:pPr algn="ctr" indent="0" marL="0">
+                        <a:buNone/>
+                      </a:pPr>
+                      <a:r>
+                        <a:rPr lang="en-US" sz="900" b="1" dirty="0">
+                          <a:solidFill>
+                            <a:srgbClr val="000000"/>
+                          </a:solidFill>
+                          <a:latin typeface="Calibri" pitchFamily="34" charset="0"/>
+                          <a:ea typeface="Calibri" pitchFamily="34" charset="-122"/>
+                          <a:cs typeface="Calibri" pitchFamily="34" charset="-120"/>
+                        </a:rPr>
+                        <a:t>Green H2</a:t>
+                      </a:r>
+                      <a:endParaRPr lang="en-US" sz="900" dirty="0">
+                        <a:latin typeface="Calibri" charset="0"/>
+                        <a:ea typeface="Calibri" charset="0"/>
+                        <a:cs typeface="Calibri" charset="0"/>
+                      </a:endParaRPr>
+                    </a:p>
+                    <a:p>
+                      <a:pPr algn="ctr" indent="0" marL="0">
+                        <a:buNone/>
+                      </a:pPr>
+                      <a:r>
+                        <a:rPr lang="en-US" sz="900" b="1" dirty="0">
+                          <a:solidFill>
+                            <a:srgbClr val="000000"/>
+                          </a:solidFill>
+                          <a:latin typeface="Calibri" pitchFamily="34" charset="0"/>
+                          <a:ea typeface="Calibri" pitchFamily="34" charset="-122"/>
+                          <a:cs typeface="Calibri" pitchFamily="34" charset="-120"/>
+                        </a:rPr>
+                        <a:t>$/kg</a:t>
+                      </a:r>
+                      <a:endParaRPr lang="en-US" sz="900" dirty="0">
+                        <a:latin typeface="Calibri" charset="0"/>
+                        <a:ea typeface="Calibri" charset="0"/>
+                        <a:cs typeface="Calibri" charset="0"/>
+                      </a:endParaRPr>
+                    </a:p>
+                  </a:txBody>
+                  <a:tcPr marL="91440" marR="91440" marT="45720" marB="45720" anchor="ctr">
+                    <a:lnL w="6350" cap="flat" cmpd="sng" algn="ctr">
+                      <a:solidFill>
+                        <a:srgbClr val="D0D0D0"/>
+                      </a:solidFill>
+                      <a:prstDash val="solid"/>
+                      <a:round/>
+                      <a:headEnd type="none" w="med" len="med"/>
+                      <a:tailEnd type="none" w="med" len="med"/>
+                    </a:lnL>
+                    <a:lnR w="6350" cap="flat" cmpd="sng" algn="ctr">
+                      <a:solidFill>
+                        <a:srgbClr val="D0D0D0"/>
+                      </a:solidFill>
+                      <a:prstDash val="solid"/>
+                      <a:round/>
+                      <a:headEnd type="none" w="med" len="med"/>
+                      <a:tailEnd type="none" w="med" len="med"/>
+                    </a:lnR>
+                    <a:lnT w="6350" cap="flat" cmpd="sng" algn="ctr">
+                      <a:solidFill>
+                        <a:srgbClr val="D0D0D0"/>
+                      </a:solidFill>
+                      <a:prstDash val="solid"/>
+                      <a:round/>
+                      <a:headEnd type="none" w="med" len="med"/>
+                      <a:tailEnd type="none" w="med" len="med"/>
+                    </a:lnT>
+                    <a:lnB w="6350" cap="flat" cmpd="sng" algn="ctr">
+                      <a:solidFill>
+                        <a:srgbClr val="D0D0D0"/>
+                      </a:solidFill>
+                      <a:prstDash val="solid"/>
+                      <a:round/>
+                      <a:headEnd type="none" w="med" len="med"/>
+                      <a:tailEnd type="none" w="med" len="med"/>
+                    </a:lnB>
+                    <a:solidFill>
+                      <a:srgbClr val="FFFFFF"/>
+                    </a:solidFill>
+                  </a:tcPr>
+                </a:tc>
+              </a:tr>
+              <a:tr h="365760">
+                <a:tc>
+                  <a:txBody>
+                    <a:bodyPr/>
+                    <a:lstStyle/>
+                    <a:p>
+                      <a:pPr indent="0" marL="0">
+                        <a:buNone/>
+                      </a:pPr>
+                      <a:r>
+                        <a:rPr lang="en-US" sz="1000" b="1" dirty="0">
+                          <a:solidFill>
+                            <a:srgbClr val="000000"/>
+                          </a:solidFill>
+                          <a:latin typeface="Calibri" pitchFamily="34" charset="0"/>
+                          <a:ea typeface="Calibri" pitchFamily="34" charset="-122"/>
+                          <a:cs typeface="Calibri" pitchFamily="34" charset="-120"/>
+                        </a:rPr>
+                        <a:t>2018</a:t>
+                      </a:r>
+                      <a:endParaRPr lang="en-US" sz="1000" dirty="0">
+                        <a:latin typeface="Calibri" charset="0"/>
+                        <a:ea typeface="Calibri" charset="0"/>
+                        <a:cs typeface="Calibri" charset="0"/>
+                      </a:endParaRPr>
+                    </a:p>
+                  </a:txBody>
+                  <a:tcPr marL="91440" marR="91440" marT="45720" marB="45720" anchor="ctr">
+                    <a:lnL w="6350" cap="flat" cmpd="sng" algn="ctr">
+                      <a:solidFill>
+                        <a:srgbClr val="D0D0D0"/>
+                      </a:solidFill>
+                      <a:prstDash val="solid"/>
+                      <a:round/>
+                      <a:headEnd type="none" w="med" len="med"/>
+                      <a:tailEnd type="none" w="med" len="med"/>
+                    </a:lnL>
+                    <a:lnR w="6350" cap="flat" cmpd="sng" algn="ctr">
+                      <a:solidFill>
+                        <a:srgbClr val="D0D0D0"/>
+                      </a:solidFill>
+                      <a:prstDash val="solid"/>
+                      <a:round/>
+                      <a:headEnd type="none" w="med" len="med"/>
+                      <a:tailEnd type="none" w="med" len="med"/>
+                    </a:lnR>
+                    <a:lnT w="6350" cap="flat" cmpd="sng" algn="ctr">
+                      <a:solidFill>
+                        <a:srgbClr val="D0D0D0"/>
+                      </a:solidFill>
+                      <a:prstDash val="solid"/>
+                      <a:round/>
+                      <a:headEnd type="none" w="med" len="med"/>
+                      <a:tailEnd type="none" w="med" len="med"/>
+                    </a:lnT>
+                    <a:lnB w="6350" cap="flat" cmpd="sng" algn="ctr">
+                      <a:solidFill>
+                        <a:srgbClr val="D0D0D0"/>
+                      </a:solidFill>
+                      <a:prstDash val="solid"/>
+                      <a:round/>
+                      <a:headEnd type="none" w="med" len="med"/>
+                      <a:tailEnd type="none" w="med" len="med"/>
+                    </a:lnB>
+                    <a:solidFill>
+                      <a:srgbClr val="FFFFFF"/>
+                    </a:solidFill>
+                  </a:tcPr>
+                </a:tc>
+                <a:tc>
+                  <a:txBody>
+                    <a:bodyPr/>
+                    <a:lstStyle/>
+                    <a:p>
+                      <a:pPr algn="ctr" indent="0" marL="0">
+                        <a:buNone/>
+                      </a:pPr>
+                      <a:r>
+                        <a:rPr lang="en-US" sz="900" dirty="0">
+                          <a:solidFill>
+                            <a:srgbClr val="333333"/>
+                          </a:solidFill>
+                          <a:latin typeface="Calibri" pitchFamily="34" charset="0"/>
+                          <a:ea typeface="Calibri" pitchFamily="34" charset="-122"/>
+                          <a:cs typeface="Calibri" pitchFamily="34" charset="-120"/>
+                        </a:rPr>
+                        <a:t>73</a:t>
+                      </a:r>
+                      <a:endParaRPr lang="en-US" sz="900" dirty="0">
+                        <a:latin typeface="Calibri" charset="0"/>
+                        <a:ea typeface="Calibri" charset="0"/>
+                        <a:cs typeface="Calibri" charset="0"/>
+                      </a:endParaRPr>
+                    </a:p>
+                  </a:txBody>
+                  <a:tcPr marL="91440" marR="91440" marT="45720" marB="45720" anchor="ctr">
+                    <a:lnL w="6350" cap="flat" cmpd="sng" algn="ctr">
+                      <a:solidFill>
+                        <a:srgbClr val="D0D0D0"/>
+                      </a:solidFill>
+                      <a:prstDash val="solid"/>
+                      <a:round/>
+                      <a:headEnd type="none" w="med" len="med"/>
+                      <a:tailEnd type="none" w="med" len="med"/>
+                    </a:lnL>
+                    <a:lnR w="6350" cap="flat" cmpd="sng" algn="ctr">
+                      <a:solidFill>
+                        <a:srgbClr val="D0D0D0"/>
+                      </a:solidFill>
+                      <a:prstDash val="solid"/>
+                      <a:round/>
+                      <a:headEnd type="none" w="med" len="med"/>
+                      <a:tailEnd type="none" w="med" len="med"/>
+                    </a:lnR>
+                    <a:lnT w="6350" cap="flat" cmpd="sng" algn="ctr">
+                      <a:solidFill>
+                        <a:srgbClr val="D0D0D0"/>
+                      </a:solidFill>
+                      <a:prstDash val="solid"/>
+                      <a:round/>
+                      <a:headEnd type="none" w="med" len="med"/>
+                      <a:tailEnd type="none" w="med" len="med"/>
+                    </a:lnT>
+                    <a:lnB w="6350" cap="flat" cmpd="sng" algn="ctr">
+                      <a:solidFill>
+                        <a:srgbClr val="D0D0D0"/>
+                      </a:solidFill>
+                      <a:prstDash val="solid"/>
+                      <a:round/>
+                      <a:headEnd type="none" w="med" len="med"/>
+                      <a:tailEnd type="none" w="med" len="med"/>
+                    </a:lnB>
+                    <a:solidFill>
+                      <a:srgbClr val="FFFFFF"/>
+                    </a:solidFill>
+                  </a:tcPr>
+                </a:tc>
+                <a:tc>
+                  <a:txBody>
+                    <a:bodyPr/>
+                    <a:lstStyle/>
+                    <a:p>
+                      <a:pPr algn="ctr" indent="0" marL="0">
+                        <a:buNone/>
+                      </a:pPr>
+                      <a:r>
+                        <a:rPr lang="en-US" sz="900" dirty="0">
+                          <a:solidFill>
+                            <a:srgbClr val="333333"/>
+                          </a:solidFill>
+                          <a:latin typeface="Calibri" pitchFamily="34" charset="0"/>
+                          <a:ea typeface="Calibri" pitchFamily="34" charset="-122"/>
+                          <a:cs typeface="Calibri" pitchFamily="34" charset="-120"/>
+                        </a:rPr>
+                        <a:t>73 (100%)</a:t>
+                      </a:r>
+                      <a:endParaRPr lang="en-US" sz="900" dirty="0">
+                        <a:latin typeface="Calibri" charset="0"/>
+                        <a:ea typeface="Calibri" charset="0"/>
+                        <a:cs typeface="Calibri" charset="0"/>
+                      </a:endParaRPr>
+                    </a:p>
+                  </a:txBody>
+                  <a:tcPr marL="91440" marR="91440" marT="45720" marB="45720" anchor="ctr">
+                    <a:lnL w="6350" cap="flat" cmpd="sng" algn="ctr">
+                      <a:solidFill>
+                        <a:srgbClr val="D0D0D0"/>
+                      </a:solidFill>
+                      <a:prstDash val="solid"/>
+                      <a:round/>
+                      <a:headEnd type="none" w="med" len="med"/>
+                      <a:tailEnd type="none" w="med" len="med"/>
+                    </a:lnL>
+                    <a:lnR w="6350" cap="flat" cmpd="sng" algn="ctr">
+                      <a:solidFill>
+                        <a:srgbClr val="D0D0D0"/>
+                      </a:solidFill>
+                      <a:prstDash val="solid"/>
+                      <a:round/>
+                      <a:headEnd type="none" w="med" len="med"/>
+                      <a:tailEnd type="none" w="med" len="med"/>
+                    </a:lnR>
+                    <a:lnT w="6350" cap="flat" cmpd="sng" algn="ctr">
+                      <a:solidFill>
+                        <a:srgbClr val="D0D0D0"/>
+                      </a:solidFill>
+                      <a:prstDash val="solid"/>
+                      <a:round/>
+                      <a:headEnd type="none" w="med" len="med"/>
+                      <a:tailEnd type="none" w="med" len="med"/>
+                    </a:lnT>
+                    <a:lnB w="6350" cap="flat" cmpd="sng" algn="ctr">
+                      <a:solidFill>
+                        <a:srgbClr val="D0D0D0"/>
+                      </a:solidFill>
+                      <a:prstDash val="solid"/>
+                      <a:round/>
+                      <a:headEnd type="none" w="med" len="med"/>
+                      <a:tailEnd type="none" w="med" len="med"/>
+                    </a:lnB>
+                    <a:solidFill>
+                      <a:srgbClr val="FFFFFF"/>
+                    </a:solidFill>
+                  </a:tcPr>
+                </a:tc>
+                <a:tc>
+                  <a:txBody>
+                    <a:bodyPr/>
+                    <a:lstStyle/>
+                    <a:p>
+                      <a:pPr algn="ctr" indent="0" marL="0">
+                        <a:buNone/>
+                      </a:pPr>
+                      <a:r>
+                        <a:rPr lang="en-US" sz="900" dirty="0">
+                          <a:solidFill>
+                            <a:srgbClr val="333333"/>
+                          </a:solidFill>
+                          <a:latin typeface="Calibri" pitchFamily="34" charset="0"/>
+                          <a:ea typeface="Calibri" pitchFamily="34" charset="-122"/>
+                          <a:cs typeface="Calibri" pitchFamily="34" charset="-120"/>
+                        </a:rPr>
+                        <a:t>~0</a:t>
+                      </a:r>
+                      <a:endParaRPr lang="en-US" sz="900" dirty="0">
+                        <a:latin typeface="Calibri" charset="0"/>
+                        <a:ea typeface="Calibri" charset="0"/>
+                        <a:cs typeface="Calibri" charset="0"/>
+                      </a:endParaRPr>
+                    </a:p>
+                  </a:txBody>
+                  <a:tcPr marL="91440" marR="91440" marT="45720" marB="45720" anchor="ctr">
+                    <a:lnL w="6350" cap="flat" cmpd="sng" algn="ctr">
+                      <a:solidFill>
+                        <a:srgbClr val="D0D0D0"/>
+                      </a:solidFill>
+                      <a:prstDash val="solid"/>
+                      <a:round/>
+                      <a:headEnd type="none" w="med" len="med"/>
+                      <a:tailEnd type="none" w="med" len="med"/>
+                    </a:lnL>
+                    <a:lnR w="6350" cap="flat" cmpd="sng" algn="ctr">
+                      <a:solidFill>
+                        <a:srgbClr val="D0D0D0"/>
+                      </a:solidFill>
+                      <a:prstDash val="solid"/>
+                      <a:round/>
+                      <a:headEnd type="none" w="med" len="med"/>
+                      <a:tailEnd type="none" w="med" len="med"/>
+                    </a:lnR>
+                    <a:lnT w="6350" cap="flat" cmpd="sng" algn="ctr">
+                      <a:solidFill>
+                        <a:srgbClr val="D0D0D0"/>
+                      </a:solidFill>
+                      <a:prstDash val="solid"/>
+                      <a:round/>
+                      <a:headEnd type="none" w="med" len="med"/>
+                      <a:tailEnd type="none" w="med" len="med"/>
+                    </a:lnT>
+                    <a:lnB w="6350" cap="flat" cmpd="sng" algn="ctr">
+                      <a:solidFill>
+                        <a:srgbClr val="D0D0D0"/>
+                      </a:solidFill>
+                      <a:prstDash val="solid"/>
+                      <a:round/>
+                      <a:headEnd type="none" w="med" len="med"/>
+                      <a:tailEnd type="none" w="med" len="med"/>
+                    </a:lnB>
+                    <a:solidFill>
+                      <a:srgbClr val="FFFFFF"/>
+                    </a:solidFill>
+                  </a:tcPr>
+                </a:tc>
+                <a:tc>
+                  <a:txBody>
+                    <a:bodyPr/>
+                    <a:lstStyle/>
+                    <a:p>
+                      <a:pPr algn="ctr" indent="0" marL="0">
+                        <a:buNone/>
+                      </a:pPr>
+                      <a:r>
+                        <a:rPr lang="en-US" sz="900" dirty="0">
+                          <a:solidFill>
+                            <a:srgbClr val="333333"/>
+                          </a:solidFill>
+                          <a:latin typeface="Calibri" pitchFamily="34" charset="0"/>
+                          <a:ea typeface="Calibri" pitchFamily="34" charset="-122"/>
+                          <a:cs typeface="Calibri" pitchFamily="34" charset="-120"/>
+                        </a:rPr>
+                        <a:t>■ ~1.0-2.5</a:t>
+                      </a:r>
+                      <a:endParaRPr lang="en-US" sz="900" dirty="0">
+                        <a:latin typeface="Calibri" charset="0"/>
+                        <a:ea typeface="Calibri" charset="0"/>
+                        <a:cs typeface="Calibri" charset="0"/>
+                      </a:endParaRPr>
+                    </a:p>
+                  </a:txBody>
+                  <a:tcPr marL="91440" marR="91440" marT="45720" marB="45720" anchor="ctr">
+                    <a:lnL w="6350" cap="flat" cmpd="sng" algn="ctr">
+                      <a:solidFill>
+                        <a:srgbClr val="D0D0D0"/>
+                      </a:solidFill>
+                      <a:prstDash val="solid"/>
+                      <a:round/>
+                      <a:headEnd type="none" w="med" len="med"/>
+                      <a:tailEnd type="none" w="med" len="med"/>
+                    </a:lnL>
+                    <a:lnR w="6350" cap="flat" cmpd="sng" algn="ctr">
+                      <a:solidFill>
+                        <a:srgbClr val="D0D0D0"/>
+                      </a:solidFill>
+                      <a:prstDash val="solid"/>
+                      <a:round/>
+                      <a:headEnd type="none" w="med" len="med"/>
+                      <a:tailEnd type="none" w="med" len="med"/>
+                    </a:lnR>
+                    <a:lnT w="6350" cap="flat" cmpd="sng" algn="ctr">
+                      <a:solidFill>
+                        <a:srgbClr val="D0D0D0"/>
+                      </a:solidFill>
+                      <a:prstDash val="solid"/>
+                      <a:round/>
+                      <a:headEnd type="none" w="med" len="med"/>
+                      <a:tailEnd type="none" w="med" len="med"/>
+                    </a:lnT>
+                    <a:lnB w="6350" cap="flat" cmpd="sng" algn="ctr">
+                      <a:solidFill>
+                        <a:srgbClr val="D0D0D0"/>
+                      </a:solidFill>
+                      <a:prstDash val="solid"/>
+                      <a:round/>
+                      <a:headEnd type="none" w="med" len="med"/>
+                      <a:tailEnd type="none" w="med" len="med"/>
+                    </a:lnB>
+                    <a:solidFill>
+                      <a:srgbClr val="FFFFFF"/>
+                    </a:solidFill>
+                  </a:tcPr>
+                </a:tc>
+                <a:tc>
+                  <a:txBody>
+                    <a:bodyPr/>
+                    <a:lstStyle/>
+                    <a:p>
+                      <a:pPr algn="ctr" indent="0" marL="0">
+                        <a:buNone/>
+                      </a:pPr>
+                      <a:r>
+                        <a:rPr lang="en-US" sz="900" dirty="0">
+                          <a:solidFill>
+                            <a:srgbClr val="333333"/>
+                          </a:solidFill>
+                          <a:latin typeface="Calibri" pitchFamily="34" charset="0"/>
+                          <a:ea typeface="Calibri" pitchFamily="34" charset="-122"/>
+                          <a:cs typeface="Calibri" pitchFamily="34" charset="-120"/>
+                        </a:rPr>
+                        <a:t>□ ~1.5-3.0</a:t>
+                      </a:r>
+                      <a:endParaRPr lang="en-US" sz="900" dirty="0">
+                        <a:latin typeface="Calibri" charset="0"/>
+                        <a:ea typeface="Calibri" charset="0"/>
+                        <a:cs typeface="Calibri" charset="0"/>
+                      </a:endParaRPr>
+                    </a:p>
+                  </a:txBody>
+                  <a:tcPr marL="91440" marR="91440" marT="45720" marB="45720" anchor="ctr">
+                    <a:lnL w="6350" cap="flat" cmpd="sng" algn="ctr">
+                      <a:solidFill>
+                        <a:srgbClr val="D0D0D0"/>
+                      </a:solidFill>
+                      <a:prstDash val="solid"/>
+                      <a:round/>
+                      <a:headEnd type="none" w="med" len="med"/>
+                      <a:tailEnd type="none" w="med" len="med"/>
+                    </a:lnL>
+                    <a:lnR w="6350" cap="flat" cmpd="sng" algn="ctr">
+                      <a:solidFill>
+                        <a:srgbClr val="D0D0D0"/>
+                      </a:solidFill>
+                      <a:prstDash val="solid"/>
+                      <a:round/>
+                      <a:headEnd type="none" w="med" len="med"/>
+                      <a:tailEnd type="none" w="med" len="med"/>
+                    </a:lnR>
+                    <a:lnT w="6350" cap="flat" cmpd="sng" algn="ctr">
+                      <a:solidFill>
+                        <a:srgbClr val="D0D0D0"/>
+                      </a:solidFill>
+                      <a:prstDash val="solid"/>
+                      <a:round/>
+                      <a:headEnd type="none" w="med" len="med"/>
+                      <a:tailEnd type="none" w="med" len="med"/>
+                    </a:lnT>
+                    <a:lnB w="6350" cap="flat" cmpd="sng" algn="ctr">
+                      <a:solidFill>
+                        <a:srgbClr val="D0D0D0"/>
+                      </a:solidFill>
+                      <a:prstDash val="solid"/>
+                      <a:round/>
+                      <a:headEnd type="none" w="med" len="med"/>
+                      <a:tailEnd type="none" w="med" len="med"/>
+                    </a:lnB>
+                    <a:solidFill>
+                      <a:srgbClr val="FFFFFF"/>
+                    </a:solidFill>
+                  </a:tcPr>
+                </a:tc>
+                <a:tc>
+                  <a:txBody>
+                    <a:bodyPr/>
+                    <a:lstStyle/>
+                    <a:p>
+                      <a:pPr algn="ctr" indent="0" marL="0">
+                        <a:buNone/>
+                      </a:pPr>
+                      <a:r>
+                        <a:rPr lang="en-US" sz="900" dirty="0">
+                          <a:solidFill>
+                            <a:srgbClr val="333333"/>
+                          </a:solidFill>
+                          <a:latin typeface="Calibri" pitchFamily="34" charset="0"/>
+                          <a:ea typeface="Calibri" pitchFamily="34" charset="-122"/>
+                          <a:cs typeface="Calibri" pitchFamily="34" charset="-120"/>
+                        </a:rPr>
+                        <a:t>4.3</a:t>
+                      </a:r>
+                      <a:endParaRPr lang="en-US" sz="900" dirty="0">
+                        <a:latin typeface="Calibri" charset="0"/>
+                        <a:ea typeface="Calibri" charset="0"/>
+                        <a:cs typeface="Calibri" charset="0"/>
+                      </a:endParaRPr>
+                    </a:p>
+                  </a:txBody>
+                  <a:tcPr marL="91440" marR="91440" marT="45720" marB="45720" anchor="ctr">
+                    <a:lnL w="6350" cap="flat" cmpd="sng" algn="ctr">
+                      <a:solidFill>
+                        <a:srgbClr val="D0D0D0"/>
+                      </a:solidFill>
+                      <a:prstDash val="solid"/>
+                      <a:round/>
+                      <a:headEnd type="none" w="med" len="med"/>
+                      <a:tailEnd type="none" w="med" len="med"/>
+                    </a:lnL>
+                    <a:lnR w="6350" cap="flat" cmpd="sng" algn="ctr">
+                      <a:solidFill>
+                        <a:srgbClr val="D0D0D0"/>
+                      </a:solidFill>
+                      <a:prstDash val="solid"/>
+                      <a:round/>
+                      <a:headEnd type="none" w="med" len="med"/>
+                      <a:tailEnd type="none" w="med" len="med"/>
+                    </a:lnR>
+                    <a:lnT w="6350" cap="flat" cmpd="sng" algn="ctr">
+                      <a:solidFill>
+                        <a:srgbClr val="D0D0D0"/>
+                      </a:solidFill>
+                      <a:prstDash val="solid"/>
+                      <a:round/>
+                      <a:headEnd type="none" w="med" len="med"/>
+                      <a:tailEnd type="none" w="med" len="med"/>
+                    </a:lnT>
+                    <a:lnB w="6350" cap="flat" cmpd="sng" algn="ctr">
+                      <a:solidFill>
+                        <a:srgbClr val="D0D0D0"/>
+                      </a:solidFill>
+                      <a:prstDash val="solid"/>
+                      <a:round/>
+                      <a:headEnd type="none" w="med" len="med"/>
+                      <a:tailEnd type="none" w="med" len="med"/>
+                    </a:lnB>
+                    <a:solidFill>
+                      <a:srgbClr val="FFFFFF"/>
+                    </a:solidFill>
+                  </a:tcPr>
+                </a:tc>
+              </a:tr>
+              <a:tr h="365760">
+                <a:tc>
+                  <a:txBody>
+                    <a:bodyPr/>
+                    <a:lstStyle/>
+                    <a:p>
+                      <a:pPr indent="0" marL="0">
+                        <a:buNone/>
+                      </a:pPr>
+                      <a:r>
+                        <a:rPr lang="en-US" sz="1000" b="1" dirty="0">
+                          <a:solidFill>
+                            <a:srgbClr val="000000"/>
                           </a:solidFill>
                           <a:latin typeface="Calibri" pitchFamily="34" charset="0"/>
                           <a:ea typeface="Calibri" pitchFamily="34" charset="-122"/>
@@ -2137,50 +2369,53 @@
                         </a:rPr>
                         <a:t>2030</a:t>
                       </a:r>
-                      <a:endParaRPr lang="en-US" sz="850" dirty="0">
+                      <a:endParaRPr lang="en-US" sz="1000" dirty="0">
                         <a:latin typeface="Calibri" charset="0"/>
                         <a:ea typeface="Calibri" charset="0"/>
                         <a:cs typeface="Calibri" charset="0"/>
                       </a:endParaRPr>
                     </a:p>
                   </a:txBody>
-                  <a:tcPr marL="50800" marR="50800" marT="25400" marB="25400" anchor="ctr">
-                    <a:lnL w="0" cap="flat" cmpd="sng" algn="ctr">
-                      <a:solidFill>
-                        <a:srgbClr val="FFFFFF"/>
+                  <a:tcPr marL="91440" marR="91440" marT="45720" marB="45720" anchor="ctr">
+                    <a:lnL w="6350" cap="flat" cmpd="sng" algn="ctr">
+                      <a:solidFill>
+                        <a:srgbClr val="D0D0D0"/>
                       </a:solidFill>
                       <a:prstDash val="solid"/>
                       <a:round/>
                       <a:headEnd type="none" w="med" len="med"/>
                       <a:tailEnd type="none" w="med" len="med"/>
                     </a:lnL>
-                    <a:lnR w="0" cap="flat" cmpd="sng" algn="ctr">
-                      <a:solidFill>
-                        <a:srgbClr val="FFFFFF"/>
+                    <a:lnR w="6350" cap="flat" cmpd="sng" algn="ctr">
+                      <a:solidFill>
+                        <a:srgbClr val="D0D0D0"/>
                       </a:solidFill>
                       <a:prstDash val="solid"/>
                       <a:round/>
                       <a:headEnd type="none" w="med" len="med"/>
                       <a:tailEnd type="none" w="med" len="med"/>
                     </a:lnR>
-                    <a:lnT w="19050" cap="flat" cmpd="sng" algn="ctr">
-                      <a:solidFill>
-                        <a:srgbClr val="0C2340"/>
+                    <a:lnT w="6350" cap="flat" cmpd="sng" algn="ctr">
+                      <a:solidFill>
+                        <a:srgbClr val="D0D0D0"/>
                       </a:solidFill>
                       <a:prstDash val="solid"/>
                       <a:round/>
                       <a:headEnd type="none" w="med" len="med"/>
                       <a:tailEnd type="none" w="med" len="med"/>
                     </a:lnT>
-                    <a:lnB w="19050" cap="flat" cmpd="sng" algn="ctr">
-                      <a:solidFill>
-                        <a:srgbClr val="0C2340"/>
+                    <a:lnB w="6350" cap="flat" cmpd="sng" algn="ctr">
+                      <a:solidFill>
+                        <a:srgbClr val="D0D0D0"/>
                       </a:solidFill>
                       <a:prstDash val="solid"/>
                       <a:round/>
                       <a:headEnd type="none" w="med" len="med"/>
                       <a:tailEnd type="none" w="med" len="med"/>
                     </a:lnB>
+                    <a:solidFill>
+                      <a:srgbClr val="FFFFFF"/>
+                    </a:solidFill>
                   </a:tcPr>
                 </a:tc>
                 <a:tc>
@@ -2192,74 +2427,7 @@
                         <a:buNone/>
                       </a:pPr>
                       <a:r>
-                        <a:rPr lang="en-US" sz="850" b="1" dirty="0">
-                          <a:solidFill>
-                            <a:srgbClr val="0C2340"/>
-                          </a:solidFill>
-                          <a:latin typeface="Calibri" pitchFamily="34" charset="0"/>
-                          <a:ea typeface="Calibri" pitchFamily="34" charset="-122"/>
-                          <a:cs typeface="Calibri" pitchFamily="34" charset="-120"/>
-                        </a:rPr>
-                        <a:t>2035</a:t>
-                      </a:r>
-                      <a:endParaRPr lang="en-US" sz="850" dirty="0">
-                        <a:latin typeface="Calibri" charset="0"/>
-                        <a:ea typeface="Calibri" charset="0"/>
-                        <a:cs typeface="Calibri" charset="0"/>
-                      </a:endParaRPr>
-                    </a:p>
-                  </a:txBody>
-                  <a:tcPr marL="50800" marR="50800" marT="25400" marB="25400" anchor="ctr">
-                    <a:lnL w="0" cap="flat" cmpd="sng" algn="ctr">
-                      <a:solidFill>
-                        <a:srgbClr val="FFFFFF"/>
-                      </a:solidFill>
-                      <a:prstDash val="solid"/>
-                      <a:round/>
-                      <a:headEnd type="none" w="med" len="med"/>
-                      <a:tailEnd type="none" w="med" len="med"/>
-                    </a:lnL>
-                    <a:lnR w="0" cap="flat" cmpd="sng" algn="ctr">
-                      <a:solidFill>
-                        <a:srgbClr val="FFFFFF"/>
-                      </a:solidFill>
-                      <a:prstDash val="solid"/>
-                      <a:round/>
-                      <a:headEnd type="none" w="med" len="med"/>
-                      <a:tailEnd type="none" w="med" len="med"/>
-                    </a:lnR>
-                    <a:lnT w="19050" cap="flat" cmpd="sng" algn="ctr">
-                      <a:solidFill>
-                        <a:srgbClr val="0C2340"/>
-                      </a:solidFill>
-                      <a:prstDash val="solid"/>
-                      <a:round/>
-                      <a:headEnd type="none" w="med" len="med"/>
-                      <a:tailEnd type="none" w="med" len="med"/>
-                    </a:lnT>
-                    <a:lnB w="19050" cap="flat" cmpd="sng" algn="ctr">
-                      <a:solidFill>
-                        <a:srgbClr val="0C2340"/>
-                      </a:solidFill>
-                      <a:prstDash val="solid"/>
-                      <a:round/>
-                      <a:headEnd type="none" w="med" len="med"/>
-                      <a:tailEnd type="none" w="med" len="med"/>
-                    </a:lnB>
-                  </a:tcPr>
-                </a:tc>
-              </a:tr>
-              <a:tr h="274320">
-                <a:tc>
-                  <a:txBody>
-                    <a:bodyPr/>
-                    <a:lstStyle/>
-                    <a:p>
-                      <a:pPr algn="l" indent="0" marL="0">
-                        <a:buNone/>
-                      </a:pPr>
-                      <a:r>
-                        <a:rPr lang="en-US" sz="850" b="1" dirty="0">
+                        <a:rPr lang="en-US" sz="900" dirty="0">
                           <a:solidFill>
                             <a:srgbClr val="333333"/>
                           </a:solidFill>
@@ -2267,37 +2435,37 @@
                           <a:ea typeface="Calibri" pitchFamily="34" charset="-122"/>
                           <a:cs typeface="Calibri" pitchFamily="34" charset="-120"/>
                         </a:rPr>
-                        <a:t>Electrolyzer capacity (GW)</a:t>
+                        <a:t>110</a:t>
                       </a:r>
-                      <a:endParaRPr lang="en-US" sz="850" dirty="0">
+                      <a:endParaRPr lang="en-US" sz="900" dirty="0">
                         <a:latin typeface="Calibri" charset="0"/>
                         <a:ea typeface="Calibri" charset="0"/>
                         <a:cs typeface="Calibri" charset="0"/>
                       </a:endParaRPr>
                     </a:p>
                   </a:txBody>
-                  <a:tcPr marL="50800" marR="50800" marT="25400" marB="25400" anchor="ctr">
-                    <a:lnL w="0" cap="flat" cmpd="sng" algn="ctr">
-                      <a:solidFill>
-                        <a:srgbClr val="FFFFFF"/>
+                  <a:tcPr marL="91440" marR="91440" marT="45720" marB="45720" anchor="ctr">
+                    <a:lnL w="6350" cap="flat" cmpd="sng" algn="ctr">
+                      <a:solidFill>
+                        <a:srgbClr val="D0D0D0"/>
                       </a:solidFill>
                       <a:prstDash val="solid"/>
                       <a:round/>
                       <a:headEnd type="none" w="med" len="med"/>
                       <a:tailEnd type="none" w="med" len="med"/>
                     </a:lnL>
-                    <a:lnR w="0" cap="flat" cmpd="sng" algn="ctr">
-                      <a:solidFill>
-                        <a:srgbClr val="FFFFFF"/>
+                    <a:lnR w="6350" cap="flat" cmpd="sng" algn="ctr">
+                      <a:solidFill>
+                        <a:srgbClr val="D0D0D0"/>
                       </a:solidFill>
                       <a:prstDash val="solid"/>
                       <a:round/>
                       <a:headEnd type="none" w="med" len="med"/>
                       <a:tailEnd type="none" w="med" len="med"/>
                     </a:lnR>
-                    <a:lnT w="0" cap="flat" cmpd="sng" algn="ctr">
-                      <a:solidFill>
-                        <a:srgbClr val="FFFFFF"/>
+                    <a:lnT w="6350" cap="flat" cmpd="sng" algn="ctr">
+                      <a:solidFill>
+                        <a:srgbClr val="D0D0D0"/>
                       </a:solidFill>
                       <a:prstDash val="solid"/>
                       <a:round/>
@@ -2306,13 +2474,16 @@
                     </a:lnT>
                     <a:lnB w="6350" cap="flat" cmpd="sng" algn="ctr">
                       <a:solidFill>
-                        <a:srgbClr val="E8E8E8"/>
+                        <a:srgbClr val="D0D0D0"/>
                       </a:solidFill>
                       <a:prstDash val="solid"/>
                       <a:round/>
                       <a:headEnd type="none" w="med" len="med"/>
                       <a:tailEnd type="none" w="med" len="med"/>
                     </a:lnB>
+                    <a:solidFill>
+                      <a:srgbClr val="FFFFFF"/>
+                    </a:solidFill>
                   </a:tcPr>
                 </a:tc>
                 <a:tc>
@@ -2324,334 +2495,7 @@
                         <a:buNone/>
                       </a:pPr>
                       <a:r>
-                        <a:rPr lang="en-US" sz="800" dirty="0">
-                          <a:solidFill>
-                            <a:srgbClr val="404040"/>
-                          </a:solidFill>
-                          <a:latin typeface="Calibri" pitchFamily="34" charset="0"/>
-                          <a:ea typeface="Calibri" pitchFamily="34" charset="-122"/>
-                          <a:cs typeface="Calibri" pitchFamily="34" charset="-120"/>
-                        </a:rPr>
-                        <a:t>0.0</a:t>
-                      </a:r>
-                      <a:endParaRPr lang="en-US" sz="800" dirty="0">
-                        <a:latin typeface="Calibri" charset="0"/>
-                        <a:ea typeface="Calibri" charset="0"/>
-                        <a:cs typeface="Calibri" charset="0"/>
-                      </a:endParaRPr>
-                    </a:p>
-                  </a:txBody>
-                  <a:tcPr marL="50800" marR="50800" marT="25400" marB="25400" anchor="ctr">
-                    <a:lnL w="0" cap="flat" cmpd="sng" algn="ctr">
-                      <a:solidFill>
-                        <a:srgbClr val="FFFFFF"/>
-                      </a:solidFill>
-                      <a:prstDash val="solid"/>
-                      <a:round/>
-                      <a:headEnd type="none" w="med" len="med"/>
-                      <a:tailEnd type="none" w="med" len="med"/>
-                    </a:lnL>
-                    <a:lnR w="0" cap="flat" cmpd="sng" algn="ctr">
-                      <a:solidFill>
-                        <a:srgbClr val="FFFFFF"/>
-                      </a:solidFill>
-                      <a:prstDash val="solid"/>
-                      <a:round/>
-                      <a:headEnd type="none" w="med" len="med"/>
-                      <a:tailEnd type="none" w="med" len="med"/>
-                    </a:lnR>
-                    <a:lnT w="0" cap="flat" cmpd="sng" algn="ctr">
-                      <a:solidFill>
-                        <a:srgbClr val="FFFFFF"/>
-                      </a:solidFill>
-                      <a:prstDash val="solid"/>
-                      <a:round/>
-                      <a:headEnd type="none" w="med" len="med"/>
-                      <a:tailEnd type="none" w="med" len="med"/>
-                    </a:lnT>
-                    <a:lnB w="6350" cap="flat" cmpd="sng" algn="ctr">
-                      <a:solidFill>
-                        <a:srgbClr val="E8E8E8"/>
-                      </a:solidFill>
-                      <a:prstDash val="solid"/>
-                      <a:round/>
-                      <a:headEnd type="none" w="med" len="med"/>
-                      <a:tailEnd type="none" w="med" len="med"/>
-                    </a:lnB>
-                  </a:tcPr>
-                </a:tc>
-                <a:tc>
-                  <a:txBody>
-                    <a:bodyPr/>
-                    <a:lstStyle/>
-                    <a:p>
-                      <a:pPr algn="ctr" indent="0" marL="0">
-                        <a:buNone/>
-                      </a:pPr>
-                      <a:r>
-                        <a:rPr lang="en-US" sz="800" dirty="0">
-                          <a:solidFill>
-                            <a:srgbClr val="404040"/>
-                          </a:solidFill>
-                          <a:latin typeface="Calibri" pitchFamily="34" charset="0"/>
-                          <a:ea typeface="Calibri" pitchFamily="34" charset="-122"/>
-                          <a:cs typeface="Calibri" pitchFamily="34" charset="-120"/>
-                        </a:rPr>
-                        <a:t>0.5</a:t>
-                      </a:r>
-                      <a:endParaRPr lang="en-US" sz="800" dirty="0">
-                        <a:latin typeface="Calibri" charset="0"/>
-                        <a:ea typeface="Calibri" charset="0"/>
-                        <a:cs typeface="Calibri" charset="0"/>
-                      </a:endParaRPr>
-                    </a:p>
-                  </a:txBody>
-                  <a:tcPr marL="50800" marR="50800" marT="25400" marB="25400" anchor="ctr">
-                    <a:lnL w="0" cap="flat" cmpd="sng" algn="ctr">
-                      <a:solidFill>
-                        <a:srgbClr val="FFFFFF"/>
-                      </a:solidFill>
-                      <a:prstDash val="solid"/>
-                      <a:round/>
-                      <a:headEnd type="none" w="med" len="med"/>
-                      <a:tailEnd type="none" w="med" len="med"/>
-                    </a:lnL>
-                    <a:lnR w="0" cap="flat" cmpd="sng" algn="ctr">
-                      <a:solidFill>
-                        <a:srgbClr val="FFFFFF"/>
-                      </a:solidFill>
-                      <a:prstDash val="solid"/>
-                      <a:round/>
-                      <a:headEnd type="none" w="med" len="med"/>
-                      <a:tailEnd type="none" w="med" len="med"/>
-                    </a:lnR>
-                    <a:lnT w="0" cap="flat" cmpd="sng" algn="ctr">
-                      <a:solidFill>
-                        <a:srgbClr val="FFFFFF"/>
-                      </a:solidFill>
-                      <a:prstDash val="solid"/>
-                      <a:round/>
-                      <a:headEnd type="none" w="med" len="med"/>
-                      <a:tailEnd type="none" w="med" len="med"/>
-                    </a:lnT>
-                    <a:lnB w="6350" cap="flat" cmpd="sng" algn="ctr">
-                      <a:solidFill>
-                        <a:srgbClr val="E8E8E8"/>
-                      </a:solidFill>
-                      <a:prstDash val="solid"/>
-                      <a:round/>
-                      <a:headEnd type="none" w="med" len="med"/>
-                      <a:tailEnd type="none" w="med" len="med"/>
-                    </a:lnB>
-                  </a:tcPr>
-                </a:tc>
-                <a:tc>
-                  <a:txBody>
-                    <a:bodyPr/>
-                    <a:lstStyle/>
-                    <a:p>
-                      <a:pPr algn="ctr" indent="0" marL="0">
-                        <a:buNone/>
-                      </a:pPr>
-                      <a:r>
-                        <a:rPr lang="en-US" sz="800" dirty="0">
-                          <a:solidFill>
-                            <a:srgbClr val="404040"/>
-                          </a:solidFill>
-                          <a:latin typeface="Calibri" pitchFamily="34" charset="0"/>
-                          <a:ea typeface="Calibri" pitchFamily="34" charset="-122"/>
-                          <a:cs typeface="Calibri" pitchFamily="34" charset="-120"/>
-                        </a:rPr>
-                        <a:t>2.0</a:t>
-                      </a:r>
-                      <a:endParaRPr lang="en-US" sz="800" dirty="0">
-                        <a:latin typeface="Calibri" charset="0"/>
-                        <a:ea typeface="Calibri" charset="0"/>
-                        <a:cs typeface="Calibri" charset="0"/>
-                      </a:endParaRPr>
-                    </a:p>
-                  </a:txBody>
-                  <a:tcPr marL="50800" marR="50800" marT="25400" marB="25400" anchor="ctr">
-                    <a:lnL w="0" cap="flat" cmpd="sng" algn="ctr">
-                      <a:solidFill>
-                        <a:srgbClr val="FFFFFF"/>
-                      </a:solidFill>
-                      <a:prstDash val="solid"/>
-                      <a:round/>
-                      <a:headEnd type="none" w="med" len="med"/>
-                      <a:tailEnd type="none" w="med" len="med"/>
-                    </a:lnL>
-                    <a:lnR w="0" cap="flat" cmpd="sng" algn="ctr">
-                      <a:solidFill>
-                        <a:srgbClr val="FFFFFF"/>
-                      </a:solidFill>
-                      <a:prstDash val="solid"/>
-                      <a:round/>
-                      <a:headEnd type="none" w="med" len="med"/>
-                      <a:tailEnd type="none" w="med" len="med"/>
-                    </a:lnR>
-                    <a:lnT w="0" cap="flat" cmpd="sng" algn="ctr">
-                      <a:solidFill>
-                        <a:srgbClr val="FFFFFF"/>
-                      </a:solidFill>
-                      <a:prstDash val="solid"/>
-                      <a:round/>
-                      <a:headEnd type="none" w="med" len="med"/>
-                      <a:tailEnd type="none" w="med" len="med"/>
-                    </a:lnT>
-                    <a:lnB w="6350" cap="flat" cmpd="sng" algn="ctr">
-                      <a:solidFill>
-                        <a:srgbClr val="E8E8E8"/>
-                      </a:solidFill>
-                      <a:prstDash val="solid"/>
-                      <a:round/>
-                      <a:headEnd type="none" w="med" len="med"/>
-                      <a:tailEnd type="none" w="med" len="med"/>
-                    </a:lnB>
-                  </a:tcPr>
-                </a:tc>
-                <a:tc>
-                  <a:txBody>
-                    <a:bodyPr/>
-                    <a:lstStyle/>
-                    <a:p>
-                      <a:pPr algn="ctr" indent="0" marL="0">
-                        <a:buNone/>
-                      </a:pPr>
-                      <a:r>
-                        <a:rPr lang="en-US" sz="800" dirty="0">
-                          <a:solidFill>
-                            <a:srgbClr val="404040"/>
-                          </a:solidFill>
-                          <a:latin typeface="Calibri" pitchFamily="34" charset="0"/>
-                          <a:ea typeface="Calibri" pitchFamily="34" charset="-122"/>
-                          <a:cs typeface="Calibri" pitchFamily="34" charset="-120"/>
-                        </a:rPr>
-                        <a:t>3–4</a:t>
-                      </a:r>
-                      <a:endParaRPr lang="en-US" sz="800" dirty="0">
-                        <a:latin typeface="Calibri" charset="0"/>
-                        <a:ea typeface="Calibri" charset="0"/>
-                        <a:cs typeface="Calibri" charset="0"/>
-                      </a:endParaRPr>
-                    </a:p>
-                  </a:txBody>
-                  <a:tcPr marL="50800" marR="50800" marT="25400" marB="25400" anchor="ctr">
-                    <a:lnL w="0" cap="flat" cmpd="sng" algn="ctr">
-                      <a:solidFill>
-                        <a:srgbClr val="FFFFFF"/>
-                      </a:solidFill>
-                      <a:prstDash val="solid"/>
-                      <a:round/>
-                      <a:headEnd type="none" w="med" len="med"/>
-                      <a:tailEnd type="none" w="med" len="med"/>
-                    </a:lnL>
-                    <a:lnR w="0" cap="flat" cmpd="sng" algn="ctr">
-                      <a:solidFill>
-                        <a:srgbClr val="FFFFFF"/>
-                      </a:solidFill>
-                      <a:prstDash val="solid"/>
-                      <a:round/>
-                      <a:headEnd type="none" w="med" len="med"/>
-                      <a:tailEnd type="none" w="med" len="med"/>
-                    </a:lnR>
-                    <a:lnT w="0" cap="flat" cmpd="sng" algn="ctr">
-                      <a:solidFill>
-                        <a:srgbClr val="FFFFFF"/>
-                      </a:solidFill>
-                      <a:prstDash val="solid"/>
-                      <a:round/>
-                      <a:headEnd type="none" w="med" len="med"/>
-                      <a:tailEnd type="none" w="med" len="med"/>
-                    </a:lnT>
-                    <a:lnB w="6350" cap="flat" cmpd="sng" algn="ctr">
-                      <a:solidFill>
-                        <a:srgbClr val="E8E8E8"/>
-                      </a:solidFill>
-                      <a:prstDash val="solid"/>
-                      <a:round/>
-                      <a:headEnd type="none" w="med" len="med"/>
-                      <a:tailEnd type="none" w="med" len="med"/>
-                    </a:lnB>
-                  </a:tcPr>
-                </a:tc>
-                <a:tc>
-                  <a:txBody>
-                    <a:bodyPr/>
-                    <a:lstStyle/>
-                    <a:p>
-                      <a:pPr algn="ctr" indent="0" marL="0">
-                        <a:buNone/>
-                      </a:pPr>
-                      <a:r>
-                        <a:rPr lang="en-US" sz="800" dirty="0">
-                          <a:solidFill>
-                            <a:srgbClr val="404040"/>
-                          </a:solidFill>
-                          <a:latin typeface="Calibri" pitchFamily="34" charset="0"/>
-                          <a:ea typeface="Calibri" pitchFamily="34" charset="-122"/>
-                          <a:cs typeface="Calibri" pitchFamily="34" charset="-120"/>
-                        </a:rPr>
-                        <a:t>6–8</a:t>
-                      </a:r>
-                      <a:endParaRPr lang="en-US" sz="800" dirty="0">
-                        <a:latin typeface="Calibri" charset="0"/>
-                        <a:ea typeface="Calibri" charset="0"/>
-                        <a:cs typeface="Calibri" charset="0"/>
-                      </a:endParaRPr>
-                    </a:p>
-                  </a:txBody>
-                  <a:tcPr marL="50800" marR="50800" marT="25400" marB="25400" anchor="ctr">
-                    <a:lnL w="0" cap="flat" cmpd="sng" algn="ctr">
-                      <a:solidFill>
-                        <a:srgbClr val="FFFFFF"/>
-                      </a:solidFill>
-                      <a:prstDash val="solid"/>
-                      <a:round/>
-                      <a:headEnd type="none" w="med" len="med"/>
-                      <a:tailEnd type="none" w="med" len="med"/>
-                    </a:lnL>
-                    <a:lnR w="0" cap="flat" cmpd="sng" algn="ctr">
-                      <a:solidFill>
-                        <a:srgbClr val="FFFFFF"/>
-                      </a:solidFill>
-                      <a:prstDash val="solid"/>
-                      <a:round/>
-                      <a:headEnd type="none" w="med" len="med"/>
-                      <a:tailEnd type="none" w="med" len="med"/>
-                    </a:lnR>
-                    <a:lnT w="0" cap="flat" cmpd="sng" algn="ctr">
-                      <a:solidFill>
-                        <a:srgbClr val="FFFFFF"/>
-                      </a:solidFill>
-                      <a:prstDash val="solid"/>
-                      <a:round/>
-                      <a:headEnd type="none" w="med" len="med"/>
-                      <a:tailEnd type="none" w="med" len="med"/>
-                    </a:lnT>
-                    <a:lnB w="6350" cap="flat" cmpd="sng" algn="ctr">
-                      <a:solidFill>
-                        <a:srgbClr val="E8E8E8"/>
-                      </a:solidFill>
-                      <a:prstDash val="solid"/>
-                      <a:round/>
-                      <a:headEnd type="none" w="med" len="med"/>
-                      <a:tailEnd type="none" w="med" len="med"/>
-                    </a:lnB>
-                  </a:tcPr>
-                </a:tc>
-              </a:tr>
-              <a:tr h="274320">
-                <a:tc>
-                  <a:txBody>
-                    <a:bodyPr/>
-                    <a:lstStyle/>
-                    <a:p>
-                      <a:pPr algn="l" indent="0" marL="0">
-                        <a:buNone/>
-                      </a:pPr>
-                      <a:r>
-                        <a:rPr lang="en-US" sz="850" b="1" dirty="0">
+                        <a:rPr lang="en-US" sz="900" dirty="0">
                           <a:solidFill>
                             <a:srgbClr val="333333"/>
                           </a:solidFill>
@@ -2659,37 +2503,37 @@
                           <a:ea typeface="Calibri" pitchFamily="34" charset="-122"/>
                           <a:cs typeface="Calibri" pitchFamily="34" charset="-120"/>
                         </a:rPr>
-                        <a:t>Green H₂ cost (€/kg)</a:t>
+                        <a:t>73+X (&gt;70%)</a:t>
                       </a:r>
-                      <a:endParaRPr lang="en-US" sz="850" dirty="0">
+                      <a:endParaRPr lang="en-US" sz="900" dirty="0">
                         <a:latin typeface="Calibri" charset="0"/>
                         <a:ea typeface="Calibri" charset="0"/>
                         <a:cs typeface="Calibri" charset="0"/>
                       </a:endParaRPr>
                     </a:p>
                   </a:txBody>
-                  <a:tcPr marL="50800" marR="50800" marT="25400" marB="25400" anchor="ctr">
-                    <a:lnL w="0" cap="flat" cmpd="sng" algn="ctr">
-                      <a:solidFill>
-                        <a:srgbClr val="FFFFFF"/>
+                  <a:tcPr marL="91440" marR="91440" marT="45720" marB="45720" anchor="ctr">
+                    <a:lnL w="6350" cap="flat" cmpd="sng" algn="ctr">
+                      <a:solidFill>
+                        <a:srgbClr val="D0D0D0"/>
                       </a:solidFill>
                       <a:prstDash val="solid"/>
                       <a:round/>
                       <a:headEnd type="none" w="med" len="med"/>
                       <a:tailEnd type="none" w="med" len="med"/>
                     </a:lnL>
-                    <a:lnR w="0" cap="flat" cmpd="sng" algn="ctr">
-                      <a:solidFill>
-                        <a:srgbClr val="FFFFFF"/>
+                    <a:lnR w="6350" cap="flat" cmpd="sng" algn="ctr">
+                      <a:solidFill>
+                        <a:srgbClr val="D0D0D0"/>
                       </a:solidFill>
                       <a:prstDash val="solid"/>
                       <a:round/>
                       <a:headEnd type="none" w="med" len="med"/>
                       <a:tailEnd type="none" w="med" len="med"/>
                     </a:lnR>
-                    <a:lnT w="0" cap="flat" cmpd="sng" algn="ctr">
-                      <a:solidFill>
-                        <a:srgbClr val="FFFFFF"/>
+                    <a:lnT w="6350" cap="flat" cmpd="sng" algn="ctr">
+                      <a:solidFill>
+                        <a:srgbClr val="D0D0D0"/>
                       </a:solidFill>
                       <a:prstDash val="solid"/>
                       <a:round/>
@@ -2698,13 +2542,16 @@
                     </a:lnT>
                     <a:lnB w="6350" cap="flat" cmpd="sng" algn="ctr">
                       <a:solidFill>
-                        <a:srgbClr val="E8E8E8"/>
+                        <a:srgbClr val="D0D0D0"/>
                       </a:solidFill>
                       <a:prstDash val="solid"/>
                       <a:round/>
                       <a:headEnd type="none" w="med" len="med"/>
                       <a:tailEnd type="none" w="med" len="med"/>
                     </a:lnB>
+                    <a:solidFill>
+                      <a:srgbClr val="FFFFFF"/>
+                    </a:solidFill>
                   </a:tcPr>
                 </a:tc>
                 <a:tc>
@@ -2716,334 +2563,7 @@
                         <a:buNone/>
                       </a:pPr>
                       <a:r>
-                        <a:rPr lang="en-US" sz="800" dirty="0">
-                          <a:solidFill>
-                            <a:srgbClr val="404040"/>
-                          </a:solidFill>
-                          <a:latin typeface="Calibri" pitchFamily="34" charset="0"/>
-                          <a:ea typeface="Calibri" pitchFamily="34" charset="-122"/>
-                          <a:cs typeface="Calibri" pitchFamily="34" charset="-120"/>
-                        </a:rPr>
-                        <a:t>6.0–8.0</a:t>
-                      </a:r>
-                      <a:endParaRPr lang="en-US" sz="800" dirty="0">
-                        <a:latin typeface="Calibri" charset="0"/>
-                        <a:ea typeface="Calibri" charset="0"/>
-                        <a:cs typeface="Calibri" charset="0"/>
-                      </a:endParaRPr>
-                    </a:p>
-                  </a:txBody>
-                  <a:tcPr marL="50800" marR="50800" marT="25400" marB="25400" anchor="ctr">
-                    <a:lnL w="0" cap="flat" cmpd="sng" algn="ctr">
-                      <a:solidFill>
-                        <a:srgbClr val="FFFFFF"/>
-                      </a:solidFill>
-                      <a:prstDash val="solid"/>
-                      <a:round/>
-                      <a:headEnd type="none" w="med" len="med"/>
-                      <a:tailEnd type="none" w="med" len="med"/>
-                    </a:lnL>
-                    <a:lnR w="0" cap="flat" cmpd="sng" algn="ctr">
-                      <a:solidFill>
-                        <a:srgbClr val="FFFFFF"/>
-                      </a:solidFill>
-                      <a:prstDash val="solid"/>
-                      <a:round/>
-                      <a:headEnd type="none" w="med" len="med"/>
-                      <a:tailEnd type="none" w="med" len="med"/>
-                    </a:lnR>
-                    <a:lnT w="0" cap="flat" cmpd="sng" algn="ctr">
-                      <a:solidFill>
-                        <a:srgbClr val="FFFFFF"/>
-                      </a:solidFill>
-                      <a:prstDash val="solid"/>
-                      <a:round/>
-                      <a:headEnd type="none" w="med" len="med"/>
-                      <a:tailEnd type="none" w="med" len="med"/>
-                    </a:lnT>
-                    <a:lnB w="6350" cap="flat" cmpd="sng" algn="ctr">
-                      <a:solidFill>
-                        <a:srgbClr val="E8E8E8"/>
-                      </a:solidFill>
-                      <a:prstDash val="solid"/>
-                      <a:round/>
-                      <a:headEnd type="none" w="med" len="med"/>
-                      <a:tailEnd type="none" w="med" len="med"/>
-                    </a:lnB>
-                  </a:tcPr>
-                </a:tc>
-                <a:tc>
-                  <a:txBody>
-                    <a:bodyPr/>
-                    <a:lstStyle/>
-                    <a:p>
-                      <a:pPr algn="ctr" indent="0" marL="0">
-                        <a:buNone/>
-                      </a:pPr>
-                      <a:r>
-                        <a:rPr lang="en-US" sz="800" dirty="0">
-                          <a:solidFill>
-                            <a:srgbClr val="404040"/>
-                          </a:solidFill>
-                          <a:latin typeface="Calibri" pitchFamily="34" charset="0"/>
-                          <a:ea typeface="Calibri" pitchFamily="34" charset="-122"/>
-                          <a:cs typeface="Calibri" pitchFamily="34" charset="-120"/>
-                        </a:rPr>
-                        <a:t>4.0–5.0</a:t>
-                      </a:r>
-                      <a:endParaRPr lang="en-US" sz="800" dirty="0">
-                        <a:latin typeface="Calibri" charset="0"/>
-                        <a:ea typeface="Calibri" charset="0"/>
-                        <a:cs typeface="Calibri" charset="0"/>
-                      </a:endParaRPr>
-                    </a:p>
-                  </a:txBody>
-                  <a:tcPr marL="50800" marR="50800" marT="25400" marB="25400" anchor="ctr">
-                    <a:lnL w="0" cap="flat" cmpd="sng" algn="ctr">
-                      <a:solidFill>
-                        <a:srgbClr val="FFFFFF"/>
-                      </a:solidFill>
-                      <a:prstDash val="solid"/>
-                      <a:round/>
-                      <a:headEnd type="none" w="med" len="med"/>
-                      <a:tailEnd type="none" w="med" len="med"/>
-                    </a:lnL>
-                    <a:lnR w="0" cap="flat" cmpd="sng" algn="ctr">
-                      <a:solidFill>
-                        <a:srgbClr val="FFFFFF"/>
-                      </a:solidFill>
-                      <a:prstDash val="solid"/>
-                      <a:round/>
-                      <a:headEnd type="none" w="med" len="med"/>
-                      <a:tailEnd type="none" w="med" len="med"/>
-                    </a:lnR>
-                    <a:lnT w="0" cap="flat" cmpd="sng" algn="ctr">
-                      <a:solidFill>
-                        <a:srgbClr val="FFFFFF"/>
-                      </a:solidFill>
-                      <a:prstDash val="solid"/>
-                      <a:round/>
-                      <a:headEnd type="none" w="med" len="med"/>
-                      <a:tailEnd type="none" w="med" len="med"/>
-                    </a:lnT>
-                    <a:lnB w="6350" cap="flat" cmpd="sng" algn="ctr">
-                      <a:solidFill>
-                        <a:srgbClr val="E8E8E8"/>
-                      </a:solidFill>
-                      <a:prstDash val="solid"/>
-                      <a:round/>
-                      <a:headEnd type="none" w="med" len="med"/>
-                      <a:tailEnd type="none" w="med" len="med"/>
-                    </a:lnB>
-                  </a:tcPr>
-                </a:tc>
-                <a:tc>
-                  <a:txBody>
-                    <a:bodyPr/>
-                    <a:lstStyle/>
-                    <a:p>
-                      <a:pPr algn="ctr" indent="0" marL="0">
-                        <a:buNone/>
-                      </a:pPr>
-                      <a:r>
-                        <a:rPr lang="en-US" sz="800" dirty="0">
-                          <a:solidFill>
-                            <a:srgbClr val="404040"/>
-                          </a:solidFill>
-                          <a:latin typeface="Calibri" pitchFamily="34" charset="0"/>
-                          <a:ea typeface="Calibri" pitchFamily="34" charset="-122"/>
-                          <a:cs typeface="Calibri" pitchFamily="34" charset="-120"/>
-                        </a:rPr>
-                        <a:t>2.5–3.5</a:t>
-                      </a:r>
-                      <a:endParaRPr lang="en-US" sz="800" dirty="0">
-                        <a:latin typeface="Calibri" charset="0"/>
-                        <a:ea typeface="Calibri" charset="0"/>
-                        <a:cs typeface="Calibri" charset="0"/>
-                      </a:endParaRPr>
-                    </a:p>
-                  </a:txBody>
-                  <a:tcPr marL="50800" marR="50800" marT="25400" marB="25400" anchor="ctr">
-                    <a:lnL w="0" cap="flat" cmpd="sng" algn="ctr">
-                      <a:solidFill>
-                        <a:srgbClr val="FFFFFF"/>
-                      </a:solidFill>
-                      <a:prstDash val="solid"/>
-                      <a:round/>
-                      <a:headEnd type="none" w="med" len="med"/>
-                      <a:tailEnd type="none" w="med" len="med"/>
-                    </a:lnL>
-                    <a:lnR w="0" cap="flat" cmpd="sng" algn="ctr">
-                      <a:solidFill>
-                        <a:srgbClr val="FFFFFF"/>
-                      </a:solidFill>
-                      <a:prstDash val="solid"/>
-                      <a:round/>
-                      <a:headEnd type="none" w="med" len="med"/>
-                      <a:tailEnd type="none" w="med" len="med"/>
-                    </a:lnR>
-                    <a:lnT w="0" cap="flat" cmpd="sng" algn="ctr">
-                      <a:solidFill>
-                        <a:srgbClr val="FFFFFF"/>
-                      </a:solidFill>
-                      <a:prstDash val="solid"/>
-                      <a:round/>
-                      <a:headEnd type="none" w="med" len="med"/>
-                      <a:tailEnd type="none" w="med" len="med"/>
-                    </a:lnT>
-                    <a:lnB w="6350" cap="flat" cmpd="sng" algn="ctr">
-                      <a:solidFill>
-                        <a:srgbClr val="E8E8E8"/>
-                      </a:solidFill>
-                      <a:prstDash val="solid"/>
-                      <a:round/>
-                      <a:headEnd type="none" w="med" len="med"/>
-                      <a:tailEnd type="none" w="med" len="med"/>
-                    </a:lnB>
-                  </a:tcPr>
-                </a:tc>
-                <a:tc>
-                  <a:txBody>
-                    <a:bodyPr/>
-                    <a:lstStyle/>
-                    <a:p>
-                      <a:pPr algn="ctr" indent="0" marL="0">
-                        <a:buNone/>
-                      </a:pPr>
-                      <a:r>
-                        <a:rPr lang="en-US" sz="800" dirty="0">
-                          <a:solidFill>
-                            <a:srgbClr val="404040"/>
-                          </a:solidFill>
-                          <a:latin typeface="Calibri" pitchFamily="34" charset="0"/>
-                          <a:ea typeface="Calibri" pitchFamily="34" charset="-122"/>
-                          <a:cs typeface="Calibri" pitchFamily="34" charset="-120"/>
-                        </a:rPr>
-                        <a:t>1.5–2.5</a:t>
-                      </a:r>
-                      <a:endParaRPr lang="en-US" sz="800" dirty="0">
-                        <a:latin typeface="Calibri" charset="0"/>
-                        <a:ea typeface="Calibri" charset="0"/>
-                        <a:cs typeface="Calibri" charset="0"/>
-                      </a:endParaRPr>
-                    </a:p>
-                  </a:txBody>
-                  <a:tcPr marL="50800" marR="50800" marT="25400" marB="25400" anchor="ctr">
-                    <a:lnL w="0" cap="flat" cmpd="sng" algn="ctr">
-                      <a:solidFill>
-                        <a:srgbClr val="FFFFFF"/>
-                      </a:solidFill>
-                      <a:prstDash val="solid"/>
-                      <a:round/>
-                      <a:headEnd type="none" w="med" len="med"/>
-                      <a:tailEnd type="none" w="med" len="med"/>
-                    </a:lnL>
-                    <a:lnR w="0" cap="flat" cmpd="sng" algn="ctr">
-                      <a:solidFill>
-                        <a:srgbClr val="FFFFFF"/>
-                      </a:solidFill>
-                      <a:prstDash val="solid"/>
-                      <a:round/>
-                      <a:headEnd type="none" w="med" len="med"/>
-                      <a:tailEnd type="none" w="med" len="med"/>
-                    </a:lnR>
-                    <a:lnT w="0" cap="flat" cmpd="sng" algn="ctr">
-                      <a:solidFill>
-                        <a:srgbClr val="FFFFFF"/>
-                      </a:solidFill>
-                      <a:prstDash val="solid"/>
-                      <a:round/>
-                      <a:headEnd type="none" w="med" len="med"/>
-                      <a:tailEnd type="none" w="med" len="med"/>
-                    </a:lnT>
-                    <a:lnB w="6350" cap="flat" cmpd="sng" algn="ctr">
-                      <a:solidFill>
-                        <a:srgbClr val="E8E8E8"/>
-                      </a:solidFill>
-                      <a:prstDash val="solid"/>
-                      <a:round/>
-                      <a:headEnd type="none" w="med" len="med"/>
-                      <a:tailEnd type="none" w="med" len="med"/>
-                    </a:lnB>
-                  </a:tcPr>
-                </a:tc>
-                <a:tc>
-                  <a:txBody>
-                    <a:bodyPr/>
-                    <a:lstStyle/>
-                    <a:p>
-                      <a:pPr algn="ctr" indent="0" marL="0">
-                        <a:buNone/>
-                      </a:pPr>
-                      <a:r>
-                        <a:rPr lang="en-US" sz="800" dirty="0">
-                          <a:solidFill>
-                            <a:srgbClr val="404040"/>
-                          </a:solidFill>
-                          <a:latin typeface="Calibri" pitchFamily="34" charset="0"/>
-                          <a:ea typeface="Calibri" pitchFamily="34" charset="-122"/>
-                          <a:cs typeface="Calibri" pitchFamily="34" charset="-120"/>
-                        </a:rPr>
-                        <a:t>1.0–1.5</a:t>
-                      </a:r>
-                      <a:endParaRPr lang="en-US" sz="800" dirty="0">
-                        <a:latin typeface="Calibri" charset="0"/>
-                        <a:ea typeface="Calibri" charset="0"/>
-                        <a:cs typeface="Calibri" charset="0"/>
-                      </a:endParaRPr>
-                    </a:p>
-                  </a:txBody>
-                  <a:tcPr marL="50800" marR="50800" marT="25400" marB="25400" anchor="ctr">
-                    <a:lnL w="0" cap="flat" cmpd="sng" algn="ctr">
-                      <a:solidFill>
-                        <a:srgbClr val="FFFFFF"/>
-                      </a:solidFill>
-                      <a:prstDash val="solid"/>
-                      <a:round/>
-                      <a:headEnd type="none" w="med" len="med"/>
-                      <a:tailEnd type="none" w="med" len="med"/>
-                    </a:lnL>
-                    <a:lnR w="0" cap="flat" cmpd="sng" algn="ctr">
-                      <a:solidFill>
-                        <a:srgbClr val="FFFFFF"/>
-                      </a:solidFill>
-                      <a:prstDash val="solid"/>
-                      <a:round/>
-                      <a:headEnd type="none" w="med" len="med"/>
-                      <a:tailEnd type="none" w="med" len="med"/>
-                    </a:lnR>
-                    <a:lnT w="0" cap="flat" cmpd="sng" algn="ctr">
-                      <a:solidFill>
-                        <a:srgbClr val="FFFFFF"/>
-                      </a:solidFill>
-                      <a:prstDash val="solid"/>
-                      <a:round/>
-                      <a:headEnd type="none" w="med" len="med"/>
-                      <a:tailEnd type="none" w="med" len="med"/>
-                    </a:lnT>
-                    <a:lnB w="6350" cap="flat" cmpd="sng" algn="ctr">
-                      <a:solidFill>
-                        <a:srgbClr val="E8E8E8"/>
-                      </a:solidFill>
-                      <a:prstDash val="solid"/>
-                      <a:round/>
-                      <a:headEnd type="none" w="med" len="med"/>
-                      <a:tailEnd type="none" w="med" len="med"/>
-                    </a:lnB>
-                  </a:tcPr>
-                </a:tc>
-              </a:tr>
-              <a:tr h="274320">
-                <a:tc>
-                  <a:txBody>
-                    <a:bodyPr/>
-                    <a:lstStyle/>
-                    <a:p>
-                      <a:pPr algn="l" indent="0" marL="0">
-                        <a:buNone/>
-                      </a:pPr>
-                      <a:r>
-                        <a:rPr lang="en-US" sz="850" b="1" dirty="0">
+                        <a:rPr lang="en-US" sz="900" dirty="0">
                           <a:solidFill>
                             <a:srgbClr val="333333"/>
                           </a:solidFill>
@@ -3051,52 +2571,55 @@
                           <a:ea typeface="Calibri" pitchFamily="34" charset="-122"/>
                           <a:cs typeface="Calibri" pitchFamily="34" charset="-120"/>
                         </a:rPr>
-                        <a:t>H₂ production (kt/yr)</a:t>
+                        <a:t>Up to 37</a:t>
                       </a:r>
-                      <a:endParaRPr lang="en-US" sz="850" dirty="0">
+                      <a:endParaRPr lang="en-US" sz="900" dirty="0">
                         <a:latin typeface="Calibri" charset="0"/>
                         <a:ea typeface="Calibri" charset="0"/>
                         <a:cs typeface="Calibri" charset="0"/>
                       </a:endParaRPr>
                     </a:p>
                   </a:txBody>
-                  <a:tcPr marL="50800" marR="50800" marT="25400" marB="25400" anchor="ctr">
-                    <a:lnL w="0" cap="flat" cmpd="sng" algn="ctr">
-                      <a:solidFill>
-                        <a:srgbClr val="FFFFFF"/>
+                  <a:tcPr marL="91440" marR="91440" marT="45720" marB="45720" anchor="ctr">
+                    <a:lnL w="6350" cap="flat" cmpd="sng" algn="ctr">
+                      <a:solidFill>
+                        <a:srgbClr val="D0D0D0"/>
                       </a:solidFill>
                       <a:prstDash val="solid"/>
                       <a:round/>
                       <a:headEnd type="none" w="med" len="med"/>
                       <a:tailEnd type="none" w="med" len="med"/>
                     </a:lnL>
-                    <a:lnR w="0" cap="flat" cmpd="sng" algn="ctr">
-                      <a:solidFill>
-                        <a:srgbClr val="FFFFFF"/>
+                    <a:lnR w="6350" cap="flat" cmpd="sng" algn="ctr">
+                      <a:solidFill>
+                        <a:srgbClr val="D0D0D0"/>
                       </a:solidFill>
                       <a:prstDash val="solid"/>
                       <a:round/>
                       <a:headEnd type="none" w="med" len="med"/>
                       <a:tailEnd type="none" w="med" len="med"/>
                     </a:lnR>
-                    <a:lnT w="0" cap="flat" cmpd="sng" algn="ctr">
-                      <a:solidFill>
-                        <a:srgbClr val="FFFFFF"/>
+                    <a:lnT w="6350" cap="flat" cmpd="sng" algn="ctr">
+                      <a:solidFill>
+                        <a:srgbClr val="D0D0D0"/>
                       </a:solidFill>
                       <a:prstDash val="solid"/>
                       <a:round/>
                       <a:headEnd type="none" w="med" len="med"/>
                       <a:tailEnd type="none" w="med" len="med"/>
                     </a:lnT>
-                    <a:lnB w="12700" cap="flat" cmpd="sng" algn="ctr">
-                      <a:solidFill>
-                        <a:srgbClr val="0C2340"/>
+                    <a:lnB w="6350" cap="flat" cmpd="sng" algn="ctr">
+                      <a:solidFill>
+                        <a:srgbClr val="D0D0D0"/>
                       </a:solidFill>
                       <a:prstDash val="solid"/>
                       <a:round/>
                       <a:headEnd type="none" w="med" len="med"/>
                       <a:tailEnd type="none" w="med" len="med"/>
                     </a:lnB>
+                    <a:solidFill>
+                      <a:srgbClr val="FFFFFF"/>
+                    </a:solidFill>
                   </a:tcPr>
                 </a:tc>
                 <a:tc>
@@ -3108,60 +2631,63 @@
                         <a:buNone/>
                       </a:pPr>
                       <a:r>
-                        <a:rPr lang="en-US" sz="800" dirty="0">
+                        <a:rPr lang="en-US" sz="900" dirty="0">
                           <a:solidFill>
-                            <a:srgbClr val="404040"/>
+                            <a:srgbClr val="333333"/>
                           </a:solidFill>
                           <a:latin typeface="Calibri" pitchFamily="34" charset="0"/>
                           <a:ea typeface="Calibri" pitchFamily="34" charset="-122"/>
                           <a:cs typeface="Calibri" pitchFamily="34" charset="-120"/>
                         </a:rPr>
-                        <a:t>&lt;1</a:t>
+                        <a:t>■ ~1.0-2.5</a:t>
                       </a:r>
-                      <a:endParaRPr lang="en-US" sz="800" dirty="0">
+                      <a:endParaRPr lang="en-US" sz="900" dirty="0">
                         <a:latin typeface="Calibri" charset="0"/>
                         <a:ea typeface="Calibri" charset="0"/>
                         <a:cs typeface="Calibri" charset="0"/>
                       </a:endParaRPr>
                     </a:p>
                   </a:txBody>
-                  <a:tcPr marL="50800" marR="50800" marT="25400" marB="25400" anchor="ctr">
-                    <a:lnL w="0" cap="flat" cmpd="sng" algn="ctr">
-                      <a:solidFill>
-                        <a:srgbClr val="FFFFFF"/>
+                  <a:tcPr marL="91440" marR="91440" marT="45720" marB="45720" anchor="ctr">
+                    <a:lnL w="6350" cap="flat" cmpd="sng" algn="ctr">
+                      <a:solidFill>
+                        <a:srgbClr val="D0D0D0"/>
                       </a:solidFill>
                       <a:prstDash val="solid"/>
                       <a:round/>
                       <a:headEnd type="none" w="med" len="med"/>
                       <a:tailEnd type="none" w="med" len="med"/>
                     </a:lnL>
-                    <a:lnR w="0" cap="flat" cmpd="sng" algn="ctr">
-                      <a:solidFill>
-                        <a:srgbClr val="FFFFFF"/>
+                    <a:lnR w="6350" cap="flat" cmpd="sng" algn="ctr">
+                      <a:solidFill>
+                        <a:srgbClr val="D0D0D0"/>
                       </a:solidFill>
                       <a:prstDash val="solid"/>
                       <a:round/>
                       <a:headEnd type="none" w="med" len="med"/>
                       <a:tailEnd type="none" w="med" len="med"/>
                     </a:lnR>
-                    <a:lnT w="0" cap="flat" cmpd="sng" algn="ctr">
-                      <a:solidFill>
-                        <a:srgbClr val="FFFFFF"/>
+                    <a:lnT w="6350" cap="flat" cmpd="sng" algn="ctr">
+                      <a:solidFill>
+                        <a:srgbClr val="D0D0D0"/>
                       </a:solidFill>
                       <a:prstDash val="solid"/>
                       <a:round/>
                       <a:headEnd type="none" w="med" len="med"/>
                       <a:tailEnd type="none" w="med" len="med"/>
                     </a:lnT>
-                    <a:lnB w="12700" cap="flat" cmpd="sng" algn="ctr">
-                      <a:solidFill>
-                        <a:srgbClr val="0C2340"/>
+                    <a:lnB w="6350" cap="flat" cmpd="sng" algn="ctr">
+                      <a:solidFill>
+                        <a:srgbClr val="D0D0D0"/>
                       </a:solidFill>
                       <a:prstDash val="solid"/>
                       <a:round/>
                       <a:headEnd type="none" w="med" len="med"/>
                       <a:tailEnd type="none" w="med" len="med"/>
                     </a:lnB>
+                    <a:solidFill>
+                      <a:srgbClr val="FFFFFF"/>
+                    </a:solidFill>
                   </a:tcPr>
                 </a:tc>
                 <a:tc>
@@ -3173,60 +2699,63 @@
                         <a:buNone/>
                       </a:pPr>
                       <a:r>
-                        <a:rPr lang="en-US" sz="800" dirty="0">
+                        <a:rPr lang="en-US" sz="900" dirty="0">
                           <a:solidFill>
-                            <a:srgbClr val="404040"/>
+                            <a:srgbClr val="333333"/>
                           </a:solidFill>
                           <a:latin typeface="Calibri" pitchFamily="34" charset="0"/>
                           <a:ea typeface="Calibri" pitchFamily="34" charset="-122"/>
                           <a:cs typeface="Calibri" pitchFamily="34" charset="-120"/>
                         </a:rPr>
-                        <a:t>20–40</a:t>
+                        <a:t>□ ~1.5-3.0</a:t>
                       </a:r>
-                      <a:endParaRPr lang="en-US" sz="800" dirty="0">
+                      <a:endParaRPr lang="en-US" sz="900" dirty="0">
                         <a:latin typeface="Calibri" charset="0"/>
                         <a:ea typeface="Calibri" charset="0"/>
                         <a:cs typeface="Calibri" charset="0"/>
                       </a:endParaRPr>
                     </a:p>
                   </a:txBody>
-                  <a:tcPr marL="50800" marR="50800" marT="25400" marB="25400" anchor="ctr">
-                    <a:lnL w="0" cap="flat" cmpd="sng" algn="ctr">
-                      <a:solidFill>
-                        <a:srgbClr val="FFFFFF"/>
+                  <a:tcPr marL="91440" marR="91440" marT="45720" marB="45720" anchor="ctr">
+                    <a:lnL w="6350" cap="flat" cmpd="sng" algn="ctr">
+                      <a:solidFill>
+                        <a:srgbClr val="D0D0D0"/>
                       </a:solidFill>
                       <a:prstDash val="solid"/>
                       <a:round/>
                       <a:headEnd type="none" w="med" len="med"/>
                       <a:tailEnd type="none" w="med" len="med"/>
                     </a:lnL>
-                    <a:lnR w="0" cap="flat" cmpd="sng" algn="ctr">
-                      <a:solidFill>
-                        <a:srgbClr val="FFFFFF"/>
+                    <a:lnR w="6350" cap="flat" cmpd="sng" algn="ctr">
+                      <a:solidFill>
+                        <a:srgbClr val="D0D0D0"/>
                       </a:solidFill>
                       <a:prstDash val="solid"/>
                       <a:round/>
                       <a:headEnd type="none" w="med" len="med"/>
                       <a:tailEnd type="none" w="med" len="med"/>
                     </a:lnR>
-                    <a:lnT w="0" cap="flat" cmpd="sng" algn="ctr">
-                      <a:solidFill>
-                        <a:srgbClr val="FFFFFF"/>
+                    <a:lnT w="6350" cap="flat" cmpd="sng" algn="ctr">
+                      <a:solidFill>
+                        <a:srgbClr val="D0D0D0"/>
                       </a:solidFill>
                       <a:prstDash val="solid"/>
                       <a:round/>
                       <a:headEnd type="none" w="med" len="med"/>
                       <a:tailEnd type="none" w="med" len="med"/>
                     </a:lnT>
-                    <a:lnB w="12700" cap="flat" cmpd="sng" algn="ctr">
-                      <a:solidFill>
-                        <a:srgbClr val="0C2340"/>
+                    <a:lnB w="6350" cap="flat" cmpd="sng" algn="ctr">
+                      <a:solidFill>
+                        <a:srgbClr val="D0D0D0"/>
                       </a:solidFill>
                       <a:prstDash val="solid"/>
                       <a:round/>
                       <a:headEnd type="none" w="med" len="med"/>
                       <a:tailEnd type="none" w="med" len="med"/>
                     </a:lnB>
+                    <a:solidFill>
+                      <a:srgbClr val="FFFFFF"/>
+                    </a:solidFill>
                   </a:tcPr>
                 </a:tc>
                 <a:tc>
@@ -3238,60 +2767,133 @@
                         <a:buNone/>
                       </a:pPr>
                       <a:r>
-                        <a:rPr lang="en-US" sz="800" dirty="0">
+                        <a:rPr lang="en-US" sz="900" dirty="0">
                           <a:solidFill>
-                            <a:srgbClr val="404040"/>
+                            <a:srgbClr val="333333"/>
                           </a:solidFill>
                           <a:latin typeface="Calibri" pitchFamily="34" charset="0"/>
                           <a:ea typeface="Calibri" pitchFamily="34" charset="-122"/>
                           <a:cs typeface="Calibri" pitchFamily="34" charset="-120"/>
                         </a:rPr>
-                        <a:t>100–200</a:t>
+                        <a:t>□ 2.0</a:t>
                       </a:r>
-                      <a:endParaRPr lang="en-US" sz="800" dirty="0">
+                      <a:endParaRPr lang="en-US" sz="900" dirty="0">
                         <a:latin typeface="Calibri" charset="0"/>
                         <a:ea typeface="Calibri" charset="0"/>
                         <a:cs typeface="Calibri" charset="0"/>
                       </a:endParaRPr>
                     </a:p>
                   </a:txBody>
-                  <a:tcPr marL="50800" marR="50800" marT="25400" marB="25400" anchor="ctr">
-                    <a:lnL w="0" cap="flat" cmpd="sng" algn="ctr">
-                      <a:solidFill>
-                        <a:srgbClr val="FFFFFF"/>
+                  <a:tcPr marL="91440" marR="91440" marT="45720" marB="45720" anchor="ctr">
+                    <a:lnL w="6350" cap="flat" cmpd="sng" algn="ctr">
+                      <a:solidFill>
+                        <a:srgbClr val="D0D0D0"/>
                       </a:solidFill>
                       <a:prstDash val="solid"/>
                       <a:round/>
                       <a:headEnd type="none" w="med" len="med"/>
                       <a:tailEnd type="none" w="med" len="med"/>
                     </a:lnL>
-                    <a:lnR w="0" cap="flat" cmpd="sng" algn="ctr">
-                      <a:solidFill>
-                        <a:srgbClr val="FFFFFF"/>
+                    <a:lnR w="6350" cap="flat" cmpd="sng" algn="ctr">
+                      <a:solidFill>
+                        <a:srgbClr val="D0D0D0"/>
                       </a:solidFill>
                       <a:prstDash val="solid"/>
                       <a:round/>
                       <a:headEnd type="none" w="med" len="med"/>
                       <a:tailEnd type="none" w="med" len="med"/>
                     </a:lnR>
-                    <a:lnT w="0" cap="flat" cmpd="sng" algn="ctr">
-                      <a:solidFill>
-                        <a:srgbClr val="FFFFFF"/>
+                    <a:lnT w="6350" cap="flat" cmpd="sng" algn="ctr">
+                      <a:solidFill>
+                        <a:srgbClr val="D0D0D0"/>
                       </a:solidFill>
                       <a:prstDash val="solid"/>
                       <a:round/>
                       <a:headEnd type="none" w="med" len="med"/>
                       <a:tailEnd type="none" w="med" len="med"/>
                     </a:lnT>
-                    <a:lnB w="12700" cap="flat" cmpd="sng" algn="ctr">
-                      <a:solidFill>
-                        <a:srgbClr val="0C2340"/>
+                    <a:lnB w="6350" cap="flat" cmpd="sng" algn="ctr">
+                      <a:solidFill>
+                        <a:srgbClr val="D0D0D0"/>
                       </a:solidFill>
                       <a:prstDash val="solid"/>
                       <a:round/>
                       <a:headEnd type="none" w="med" len="med"/>
                       <a:tailEnd type="none" w="med" len="med"/>
                     </a:lnB>
+                    <a:solidFill>
+                      <a:srgbClr val="FFFFFF"/>
+                    </a:solidFill>
+                  </a:tcPr>
+                </a:tc>
+              </a:tr>
+              <a:tr h="365760">
+                <a:tc>
+                  <a:txBody>
+                    <a:bodyPr/>
+                    <a:lstStyle/>
+                    <a:p>
+                      <a:pPr indent="0" marL="0">
+                        <a:buNone/>
+                      </a:pPr>
+                      <a:r>
+                        <a:rPr lang="en-US" sz="1000" b="1" dirty="0">
+                          <a:solidFill>
+                            <a:srgbClr val="000000"/>
+                          </a:solidFill>
+                          <a:latin typeface="Calibri" pitchFamily="34" charset="0"/>
+                          <a:ea typeface="Calibri" pitchFamily="34" charset="-122"/>
+                          <a:cs typeface="Calibri" pitchFamily="34" charset="-120"/>
+                        </a:rPr>
+                        <a:t>2050</a:t>
+                      </a:r>
+                      <a:endParaRPr lang="en-US" sz="1000" dirty="0">
+                        <a:latin typeface="Calibri" charset="0"/>
+                        <a:ea typeface="Calibri" charset="0"/>
+                        <a:cs typeface="Calibri" charset="0"/>
+                      </a:endParaRPr>
+                    </a:p>
+                  </a:txBody>
+                  <a:tcPr marL="91440" marR="91440" marT="45720" marB="45720" anchor="ctr">
+                    <a:lnL w="6350" cap="flat" cmpd="sng" algn="ctr">
+                      <a:solidFill>
+                        <a:srgbClr val="D0D0D0"/>
+                      </a:solidFill>
+                      <a:prstDash val="solid"/>
+                      <a:round/>
+                      <a:headEnd type="none" w="med" len="med"/>
+                      <a:tailEnd type="none" w="med" len="med"/>
+                    </a:lnL>
+                    <a:lnR w="6350" cap="flat" cmpd="sng" algn="ctr">
+                      <a:solidFill>
+                        <a:srgbClr val="D0D0D0"/>
+                      </a:solidFill>
+                      <a:prstDash val="solid"/>
+                      <a:round/>
+                      <a:headEnd type="none" w="med" len="med"/>
+                      <a:tailEnd type="none" w="med" len="med"/>
+                    </a:lnR>
+                    <a:lnT w="6350" cap="flat" cmpd="sng" algn="ctr">
+                      <a:solidFill>
+                        <a:srgbClr val="D0D0D0"/>
+                      </a:solidFill>
+                      <a:prstDash val="solid"/>
+                      <a:round/>
+                      <a:headEnd type="none" w="med" len="med"/>
+                      <a:tailEnd type="none" w="med" len="med"/>
+                    </a:lnT>
+                    <a:lnB w="6350" cap="flat" cmpd="sng" algn="ctr">
+                      <a:solidFill>
+                        <a:srgbClr val="D0D0D0"/>
+                      </a:solidFill>
+                      <a:prstDash val="solid"/>
+                      <a:round/>
+                      <a:headEnd type="none" w="med" len="med"/>
+                      <a:tailEnd type="none" w="med" len="med"/>
+                    </a:lnB>
+                    <a:solidFill>
+                      <a:srgbClr val="FFFFFF"/>
+                    </a:solidFill>
                   </a:tcPr>
                 </a:tc>
                 <a:tc>
@@ -3303,60 +2905,63 @@
                         <a:buNone/>
                       </a:pPr>
                       <a:r>
-                        <a:rPr lang="en-US" sz="800" dirty="0">
+                        <a:rPr lang="en-US" sz="900" dirty="0">
                           <a:solidFill>
-                            <a:srgbClr val="404040"/>
+                            <a:srgbClr val="333333"/>
                           </a:solidFill>
                           <a:latin typeface="Calibri" pitchFamily="34" charset="0"/>
                           <a:ea typeface="Calibri" pitchFamily="34" charset="-122"/>
                           <a:cs typeface="Calibri" pitchFamily="34" charset="-120"/>
                         </a:rPr>
-                        <a:t>300–500</a:t>
+                        <a:t>545</a:t>
                       </a:r>
-                      <a:endParaRPr lang="en-US" sz="800" dirty="0">
+                      <a:endParaRPr lang="en-US" sz="900" dirty="0">
                         <a:latin typeface="Calibri" charset="0"/>
                         <a:ea typeface="Calibri" charset="0"/>
                         <a:cs typeface="Calibri" charset="0"/>
                       </a:endParaRPr>
                     </a:p>
                   </a:txBody>
-                  <a:tcPr marL="50800" marR="50800" marT="25400" marB="25400" anchor="ctr">
-                    <a:lnL w="0" cap="flat" cmpd="sng" algn="ctr">
-                      <a:solidFill>
-                        <a:srgbClr val="FFFFFF"/>
+                  <a:tcPr marL="91440" marR="91440" marT="45720" marB="45720" anchor="ctr">
+                    <a:lnL w="6350" cap="flat" cmpd="sng" algn="ctr">
+                      <a:solidFill>
+                        <a:srgbClr val="D0D0D0"/>
                       </a:solidFill>
                       <a:prstDash val="solid"/>
                       <a:round/>
                       <a:headEnd type="none" w="med" len="med"/>
                       <a:tailEnd type="none" w="med" len="med"/>
                     </a:lnL>
-                    <a:lnR w="0" cap="flat" cmpd="sng" algn="ctr">
-                      <a:solidFill>
-                        <a:srgbClr val="FFFFFF"/>
+                    <a:lnR w="6350" cap="flat" cmpd="sng" algn="ctr">
+                      <a:solidFill>
+                        <a:srgbClr val="D0D0D0"/>
                       </a:solidFill>
                       <a:prstDash val="solid"/>
                       <a:round/>
                       <a:headEnd type="none" w="med" len="med"/>
                       <a:tailEnd type="none" w="med" len="med"/>
                     </a:lnR>
-                    <a:lnT w="0" cap="flat" cmpd="sng" algn="ctr">
-                      <a:solidFill>
-                        <a:srgbClr val="FFFFFF"/>
+                    <a:lnT w="6350" cap="flat" cmpd="sng" algn="ctr">
+                      <a:solidFill>
+                        <a:srgbClr val="D0D0D0"/>
                       </a:solidFill>
                       <a:prstDash val="solid"/>
                       <a:round/>
                       <a:headEnd type="none" w="med" len="med"/>
                       <a:tailEnd type="none" w="med" len="med"/>
                     </a:lnT>
-                    <a:lnB w="12700" cap="flat" cmpd="sng" algn="ctr">
-                      <a:solidFill>
-                        <a:srgbClr val="0C2340"/>
+                    <a:lnB w="6350" cap="flat" cmpd="sng" algn="ctr">
+                      <a:solidFill>
+                        <a:srgbClr val="D0D0D0"/>
                       </a:solidFill>
                       <a:prstDash val="solid"/>
                       <a:round/>
                       <a:headEnd type="none" w="med" len="med"/>
                       <a:tailEnd type="none" w="med" len="med"/>
                     </a:lnB>
+                    <a:solidFill>
+                      <a:srgbClr val="FFFFFF"/>
+                    </a:solidFill>
                   </a:tcPr>
                 </a:tc>
                 <a:tc>
@@ -3368,60 +2973,335 @@
                         <a:buNone/>
                       </a:pPr>
                       <a:r>
-                        <a:rPr lang="en-US" sz="800" dirty="0">
+                        <a:rPr lang="en-US" sz="900" dirty="0">
                           <a:solidFill>
-                            <a:srgbClr val="404040"/>
+                            <a:srgbClr val="333333"/>
                           </a:solidFill>
                           <a:latin typeface="Calibri" pitchFamily="34" charset="0"/>
                           <a:ea typeface="Calibri" pitchFamily="34" charset="-122"/>
                           <a:cs typeface="Calibri" pitchFamily="34" charset="-120"/>
                         </a:rPr>
-                        <a:t>800–1,200</a:t>
+                        <a:t>73+/-X (&lt;20%)</a:t>
                       </a:r>
-                      <a:endParaRPr lang="en-US" sz="800" dirty="0">
+                      <a:endParaRPr lang="en-US" sz="900" dirty="0">
                         <a:latin typeface="Calibri" charset="0"/>
                         <a:ea typeface="Calibri" charset="0"/>
                         <a:cs typeface="Calibri" charset="0"/>
                       </a:endParaRPr>
                     </a:p>
                   </a:txBody>
-                  <a:tcPr marL="50800" marR="50800" marT="25400" marB="25400" anchor="ctr">
-                    <a:lnL w="0" cap="flat" cmpd="sng" algn="ctr">
-                      <a:solidFill>
-                        <a:srgbClr val="FFFFFF"/>
+                  <a:tcPr marL="91440" marR="91440" marT="45720" marB="45720" anchor="ctr">
+                    <a:lnL w="6350" cap="flat" cmpd="sng" algn="ctr">
+                      <a:solidFill>
+                        <a:srgbClr val="D0D0D0"/>
                       </a:solidFill>
                       <a:prstDash val="solid"/>
                       <a:round/>
                       <a:headEnd type="none" w="med" len="med"/>
                       <a:tailEnd type="none" w="med" len="med"/>
                     </a:lnL>
-                    <a:lnR w="0" cap="flat" cmpd="sng" algn="ctr">
-                      <a:solidFill>
-                        <a:srgbClr val="FFFFFF"/>
+                    <a:lnR w="6350" cap="flat" cmpd="sng" algn="ctr">
+                      <a:solidFill>
+                        <a:srgbClr val="D0D0D0"/>
                       </a:solidFill>
                       <a:prstDash val="solid"/>
                       <a:round/>
                       <a:headEnd type="none" w="med" len="med"/>
                       <a:tailEnd type="none" w="med" len="med"/>
                     </a:lnR>
-                    <a:lnT w="0" cap="flat" cmpd="sng" algn="ctr">
-                      <a:solidFill>
-                        <a:srgbClr val="FFFFFF"/>
+                    <a:lnT w="6350" cap="flat" cmpd="sng" algn="ctr">
+                      <a:solidFill>
+                        <a:srgbClr val="D0D0D0"/>
                       </a:solidFill>
                       <a:prstDash val="solid"/>
                       <a:round/>
                       <a:headEnd type="none" w="med" len="med"/>
                       <a:tailEnd type="none" w="med" len="med"/>
                     </a:lnT>
-                    <a:lnB w="12700" cap="flat" cmpd="sng" algn="ctr">
-                      <a:solidFill>
-                        <a:srgbClr val="0C2340"/>
+                    <a:lnB w="6350" cap="flat" cmpd="sng" algn="ctr">
+                      <a:solidFill>
+                        <a:srgbClr val="D0D0D0"/>
                       </a:solidFill>
                       <a:prstDash val="solid"/>
                       <a:round/>
                       <a:headEnd type="none" w="med" len="med"/>
                       <a:tailEnd type="none" w="med" len="med"/>
                     </a:lnB>
+                    <a:solidFill>
+                      <a:srgbClr val="FFFFFF"/>
+                    </a:solidFill>
+                  </a:tcPr>
+                </a:tc>
+                <a:tc>
+                  <a:txBody>
+                    <a:bodyPr/>
+                    <a:lstStyle/>
+                    <a:p>
+                      <a:pPr algn="ctr" indent="0" marL="0">
+                        <a:buNone/>
+                      </a:pPr>
+                      <a:r>
+                        <a:rPr lang="en-US" sz="900" dirty="0">
+                          <a:solidFill>
+                            <a:srgbClr val="333333"/>
+                          </a:solidFill>
+                          <a:latin typeface="Calibri" pitchFamily="34" charset="0"/>
+                          <a:ea typeface="Calibri" pitchFamily="34" charset="-122"/>
+                          <a:cs typeface="Calibri" pitchFamily="34" charset="-120"/>
+                        </a:rPr>
+                        <a:t>Up to 472</a:t>
+                      </a:r>
+                      <a:endParaRPr lang="en-US" sz="900" dirty="0">
+                        <a:latin typeface="Calibri" charset="0"/>
+                        <a:ea typeface="Calibri" charset="0"/>
+                        <a:cs typeface="Calibri" charset="0"/>
+                      </a:endParaRPr>
+                    </a:p>
+                  </a:txBody>
+                  <a:tcPr marL="91440" marR="91440" marT="45720" marB="45720" anchor="ctr">
+                    <a:lnL w="6350" cap="flat" cmpd="sng" algn="ctr">
+                      <a:solidFill>
+                        <a:srgbClr val="D0D0D0"/>
+                      </a:solidFill>
+                      <a:prstDash val="solid"/>
+                      <a:round/>
+                      <a:headEnd type="none" w="med" len="med"/>
+                      <a:tailEnd type="none" w="med" len="med"/>
+                    </a:lnL>
+                    <a:lnR w="6350" cap="flat" cmpd="sng" algn="ctr">
+                      <a:solidFill>
+                        <a:srgbClr val="D0D0D0"/>
+                      </a:solidFill>
+                      <a:prstDash val="solid"/>
+                      <a:round/>
+                      <a:headEnd type="none" w="med" len="med"/>
+                      <a:tailEnd type="none" w="med" len="med"/>
+                    </a:lnR>
+                    <a:lnT w="6350" cap="flat" cmpd="sng" algn="ctr">
+                      <a:solidFill>
+                        <a:srgbClr val="D0D0D0"/>
+                      </a:solidFill>
+                      <a:prstDash val="solid"/>
+                      <a:round/>
+                      <a:headEnd type="none" w="med" len="med"/>
+                      <a:tailEnd type="none" w="med" len="med"/>
+                    </a:lnT>
+                    <a:lnB w="6350" cap="flat" cmpd="sng" algn="ctr">
+                      <a:solidFill>
+                        <a:srgbClr val="D0D0D0"/>
+                      </a:solidFill>
+                      <a:prstDash val="solid"/>
+                      <a:round/>
+                      <a:headEnd type="none" w="med" len="med"/>
+                      <a:tailEnd type="none" w="med" len="med"/>
+                    </a:lnB>
+                    <a:solidFill>
+                      <a:srgbClr val="FFFFFF"/>
+                    </a:solidFill>
+                  </a:tcPr>
+                </a:tc>
+                <a:tc>
+                  <a:txBody>
+                    <a:bodyPr/>
+                    <a:lstStyle/>
+                    <a:p>
+                      <a:pPr algn="ctr" indent="0" marL="0">
+                        <a:buNone/>
+                      </a:pPr>
+                      <a:r>
+                        <a:rPr lang="en-US" sz="900" dirty="0">
+                          <a:solidFill>
+                            <a:srgbClr val="333333"/>
+                          </a:solidFill>
+                          <a:latin typeface="Calibri" pitchFamily="34" charset="0"/>
+                          <a:ea typeface="Calibri" pitchFamily="34" charset="-122"/>
+                          <a:cs typeface="Calibri" pitchFamily="34" charset="-120"/>
+                        </a:rPr>
+                        <a:t>“</a:t>
+                      </a:r>
+                      <a:endParaRPr lang="en-US" sz="900" dirty="0">
+                        <a:latin typeface="Calibri" charset="0"/>
+                        <a:ea typeface="Calibri" charset="0"/>
+                        <a:cs typeface="Calibri" charset="0"/>
+                      </a:endParaRPr>
+                    </a:p>
+                  </a:txBody>
+                  <a:tcPr marL="91440" marR="91440" marT="45720" marB="45720" anchor="ctr">
+                    <a:lnL w="6350" cap="flat" cmpd="sng" algn="ctr">
+                      <a:solidFill>
+                        <a:srgbClr val="D0D0D0"/>
+                      </a:solidFill>
+                      <a:prstDash val="solid"/>
+                      <a:round/>
+                      <a:headEnd type="none" w="med" len="med"/>
+                      <a:tailEnd type="none" w="med" len="med"/>
+                    </a:lnL>
+                    <a:lnR w="6350" cap="flat" cmpd="sng" algn="ctr">
+                      <a:solidFill>
+                        <a:srgbClr val="D0D0D0"/>
+                      </a:solidFill>
+                      <a:prstDash val="solid"/>
+                      <a:round/>
+                      <a:headEnd type="none" w="med" len="med"/>
+                      <a:tailEnd type="none" w="med" len="med"/>
+                    </a:lnR>
+                    <a:lnT w="6350" cap="flat" cmpd="sng" algn="ctr">
+                      <a:solidFill>
+                        <a:srgbClr val="D0D0D0"/>
+                      </a:solidFill>
+                      <a:prstDash val="solid"/>
+                      <a:round/>
+                      <a:headEnd type="none" w="med" len="med"/>
+                      <a:tailEnd type="none" w="med" len="med"/>
+                    </a:lnT>
+                    <a:lnB w="6350" cap="flat" cmpd="sng" algn="ctr">
+                      <a:solidFill>
+                        <a:srgbClr val="D0D0D0"/>
+                      </a:solidFill>
+                      <a:prstDash val="solid"/>
+                      <a:round/>
+                      <a:headEnd type="none" w="med" len="med"/>
+                      <a:tailEnd type="none" w="med" len="med"/>
+                    </a:lnB>
+                    <a:solidFill>
+                      <a:srgbClr val="FFFFFF"/>
+                    </a:solidFill>
+                  </a:tcPr>
+                </a:tc>
+                <a:tc>
+                  <a:txBody>
+                    <a:bodyPr/>
+                    <a:lstStyle/>
+                    <a:p>
+                      <a:pPr algn="ctr" indent="0" marL="0">
+                        <a:buNone/>
+                      </a:pPr>
+                      <a:r>
+                        <a:rPr lang="en-US" sz="900" dirty="0">
+                          <a:solidFill>
+                            <a:srgbClr val="333333"/>
+                          </a:solidFill>
+                          <a:latin typeface="Calibri" pitchFamily="34" charset="0"/>
+                          <a:ea typeface="Calibri" pitchFamily="34" charset="-122"/>
+                          <a:cs typeface="Calibri" pitchFamily="34" charset="-120"/>
+                        </a:rPr>
+                        <a:t>“</a:t>
+                      </a:r>
+                      <a:endParaRPr lang="en-US" sz="900" dirty="0">
+                        <a:latin typeface="Calibri" charset="0"/>
+                        <a:ea typeface="Calibri" charset="0"/>
+                        <a:cs typeface="Calibri" charset="0"/>
+                      </a:endParaRPr>
+                    </a:p>
+                  </a:txBody>
+                  <a:tcPr marL="91440" marR="91440" marT="45720" marB="45720" anchor="ctr">
+                    <a:lnL w="6350" cap="flat" cmpd="sng" algn="ctr">
+                      <a:solidFill>
+                        <a:srgbClr val="D0D0D0"/>
+                      </a:solidFill>
+                      <a:prstDash val="solid"/>
+                      <a:round/>
+                      <a:headEnd type="none" w="med" len="med"/>
+                      <a:tailEnd type="none" w="med" len="med"/>
+                    </a:lnL>
+                    <a:lnR w="6350" cap="flat" cmpd="sng" algn="ctr">
+                      <a:solidFill>
+                        <a:srgbClr val="D0D0D0"/>
+                      </a:solidFill>
+                      <a:prstDash val="solid"/>
+                      <a:round/>
+                      <a:headEnd type="none" w="med" len="med"/>
+                      <a:tailEnd type="none" w="med" len="med"/>
+                    </a:lnR>
+                    <a:lnT w="6350" cap="flat" cmpd="sng" algn="ctr">
+                      <a:solidFill>
+                        <a:srgbClr val="D0D0D0"/>
+                      </a:solidFill>
+                      <a:prstDash val="solid"/>
+                      <a:round/>
+                      <a:headEnd type="none" w="med" len="med"/>
+                      <a:tailEnd type="none" w="med" len="med"/>
+                    </a:lnT>
+                    <a:lnB w="6350" cap="flat" cmpd="sng" algn="ctr">
+                      <a:solidFill>
+                        <a:srgbClr val="D0D0D0"/>
+                      </a:solidFill>
+                      <a:prstDash val="solid"/>
+                      <a:round/>
+                      <a:headEnd type="none" w="med" len="med"/>
+                      <a:tailEnd type="none" w="med" len="med"/>
+                    </a:lnB>
+                    <a:solidFill>
+                      <a:srgbClr val="FFFFFF"/>
+                    </a:solidFill>
+                  </a:tcPr>
+                </a:tc>
+                <a:tc>
+                  <a:txBody>
+                    <a:bodyPr/>
+                    <a:lstStyle/>
+                    <a:p>
+                      <a:pPr algn="ctr" indent="0" marL="0">
+                        <a:buNone/>
+                      </a:pPr>
+                      <a:r>
+                        <a:rPr lang="en-US" sz="900" dirty="0">
+                          <a:solidFill>
+                            <a:srgbClr val="333333"/>
+                          </a:solidFill>
+                          <a:latin typeface="Calibri" pitchFamily="34" charset="0"/>
+                          <a:ea typeface="Calibri" pitchFamily="34" charset="-122"/>
+                          <a:cs typeface="Calibri" pitchFamily="34" charset="-120"/>
+                        </a:rPr>
+                        <a:t>■ 1.3</a:t>
+                      </a:r>
+                      <a:endParaRPr lang="en-US" sz="900" dirty="0">
+                        <a:latin typeface="Calibri" charset="0"/>
+                        <a:ea typeface="Calibri" charset="0"/>
+                        <a:cs typeface="Calibri" charset="0"/>
+                      </a:endParaRPr>
+                    </a:p>
+                  </a:txBody>
+                  <a:tcPr marL="91440" marR="91440" marT="45720" marB="45720" anchor="ctr">
+                    <a:lnL w="6350" cap="flat" cmpd="sng" algn="ctr">
+                      <a:solidFill>
+                        <a:srgbClr val="D0D0D0"/>
+                      </a:solidFill>
+                      <a:prstDash val="solid"/>
+                      <a:round/>
+                      <a:headEnd type="none" w="med" len="med"/>
+                      <a:tailEnd type="none" w="med" len="med"/>
+                    </a:lnL>
+                    <a:lnR w="6350" cap="flat" cmpd="sng" algn="ctr">
+                      <a:solidFill>
+                        <a:srgbClr val="D0D0D0"/>
+                      </a:solidFill>
+                      <a:prstDash val="solid"/>
+                      <a:round/>
+                      <a:headEnd type="none" w="med" len="med"/>
+                      <a:tailEnd type="none" w="med" len="med"/>
+                    </a:lnR>
+                    <a:lnT w="6350" cap="flat" cmpd="sng" algn="ctr">
+                      <a:solidFill>
+                        <a:srgbClr val="D0D0D0"/>
+                      </a:solidFill>
+                      <a:prstDash val="solid"/>
+                      <a:round/>
+                      <a:headEnd type="none" w="med" len="med"/>
+                      <a:tailEnd type="none" w="med" len="med"/>
+                    </a:lnT>
+                    <a:lnB w="6350" cap="flat" cmpd="sng" algn="ctr">
+                      <a:solidFill>
+                        <a:srgbClr val="D0D0D0"/>
+                      </a:solidFill>
+                      <a:prstDash val="solid"/>
+                      <a:round/>
+                      <a:headEnd type="none" w="med" len="med"/>
+                      <a:tailEnd type="none" w="med" len="med"/>
+                    </a:lnB>
+                    <a:solidFill>
+                      <a:srgbClr val="FFFFFF"/>
+                    </a:solidFill>
                   </a:tcPr>
                 </a:tc>
               </a:tr>
@@ -3431,14 +3311,14 @@
       </p:graphicFrame>
       <p:sp>
         <p:nvSpPr>
-          <p:cNvPr id="31" name="Text 28"/>
+          <p:cNvPr id="11" name="Text 8"/>
           <p:cNvSpPr/>
           <p:nvPr/>
         </p:nvSpPr>
         <p:spPr>
           <a:xfrm>
-            <a:off x="457200" y="4754880"/>
-            <a:ext cx="11274552" cy="182880"/>
+            <a:off x="457200" y="3154680"/>
+            <a:ext cx="8229600" cy="457200"/>
           </a:xfrm>
           <a:prstGeom prst="rect">
             <a:avLst/>
@@ -3447,37 +3327,142 @@
           <a:ln/>
         </p:spPr>
         <p:txBody>
-          <a:bodyPr wrap="square" lIns="0" tIns="0" rIns="0" bIns="0" rtlCol="0" anchor="t"/>
+          <a:bodyPr wrap="square" lIns="0" tIns="0" rIns="0" bIns="0" rtlCol="0" anchor="ctr"/>
           <a:lstStyle/>
           <a:p>
             <a:pPr indent="0" marL="0">
+              <a:lnSpc>
+                <a:spcPct val="130000"/>
+              </a:lnSpc>
               <a:buNone/>
             </a:pPr>
             <a:r>
-              <a:rPr lang="en-US" sz="650" i="1" dirty="0">
+              <a:rPr lang="en-US" sz="900" dirty="0">
                 <a:solidFill>
-                  <a:srgbClr val="999999"/>
+                  <a:srgbClr val="333333"/>
                 </a:solidFill>
                 <a:latin typeface="Calibri" pitchFamily="34" charset="0"/>
                 <a:ea typeface="Calibri" pitchFamily="34" charset="-122"/>
                 <a:cs typeface="Calibri" pitchFamily="34" charset="-120"/>
               </a:rPr>
-              <a:t>Note: Capacity and cost projections are indicative targets based on national and EU policy documents; actual figures may vary.</a:t>
+              <a:t>Green hydrogen cost trajectory follows a similar pattern to solar PV, which saw an 89% cost</a:t>
             </a:r>
-            <a:endParaRPr lang="en-US" sz="650" dirty="0"/>
+            <a:endParaRPr lang="en-US" sz="900" dirty="0"/>
+          </a:p>
+          <a:p>
+            <a:pPr indent="0" marL="0">
+              <a:lnSpc>
+                <a:spcPct val="130000"/>
+              </a:lnSpc>
+              <a:buNone/>
+            </a:pPr>
+            <a:r>
+              <a:rPr lang="en-US" sz="900" dirty="0">
+                <a:solidFill>
+                  <a:srgbClr val="333333"/>
+                </a:solidFill>
+                <a:latin typeface="Calibri" pitchFamily="34" charset="0"/>
+                <a:ea typeface="Calibri" pitchFamily="34" charset="-122"/>
+                <a:cs typeface="Calibri" pitchFamily="34" charset="-120"/>
+              </a:rPr>
+              <a:t>reduction between 2010-2020. Key drivers include falling electrolyzer costs, increasing renewable</a:t>
+            </a:r>
+            <a:endParaRPr lang="en-US" sz="900" dirty="0"/>
+          </a:p>
+          <a:p>
+            <a:pPr indent="0" marL="0">
+              <a:lnSpc>
+                <a:spcPct val="130000"/>
+              </a:lnSpc>
+              <a:buNone/>
+            </a:pPr>
+            <a:r>
+              <a:rPr lang="en-US" sz="900" dirty="0">
+                <a:solidFill>
+                  <a:srgbClr val="333333"/>
+                </a:solidFill>
+                <a:latin typeface="Calibri" pitchFamily="34" charset="0"/>
+                <a:ea typeface="Calibri" pitchFamily="34" charset="-122"/>
+                <a:cs typeface="Calibri" pitchFamily="34" charset="-120"/>
+              </a:rPr>
+              <a:t>energy availability, and scaling of manufacturing capacity.</a:t>
+            </a:r>
+            <a:endParaRPr lang="en-US" sz="900" dirty="0"/>
           </a:p>
         </p:txBody>
       </p:sp>
       <p:sp>
         <p:nvSpPr>
-          <p:cNvPr id="32" name="Shape 29"/>
+          <p:cNvPr id="12" name="Text 9"/>
           <p:cNvSpPr/>
           <p:nvPr/>
         </p:nvSpPr>
         <p:spPr>
           <a:xfrm>
-            <a:off x="457200" y="5897880"/>
-            <a:ext cx="11274552" cy="0"/>
+            <a:off x="457200" y="4160520"/>
+            <a:ext cx="7772400" cy="274320"/>
+          </a:xfrm>
+          <a:prstGeom prst="rect">
+            <a:avLst/>
+          </a:prstGeom>
+          <a:noFill/>
+          <a:ln/>
+        </p:spPr>
+        <p:txBody>
+          <a:bodyPr wrap="square" lIns="0" tIns="0" rIns="0" bIns="0" rtlCol="0" anchor="ctr"/>
+          <a:lstStyle/>
+          <a:p>
+            <a:pPr indent="0" marL="0">
+              <a:lnSpc>
+                <a:spcPct val="115000"/>
+              </a:lnSpc>
+              <a:buNone/>
+            </a:pPr>
+            <a:r>
+              <a:rPr lang="en-US" sz="600" dirty="0">
+                <a:solidFill>
+                  <a:srgbClr val="666666"/>
+                </a:solidFill>
+                <a:latin typeface="Calibri" pitchFamily="34" charset="0"/>
+                <a:ea typeface="Calibri" pitchFamily="34" charset="-122"/>
+                <a:cs typeface="Calibri" pitchFamily="34" charset="-120"/>
+              </a:rPr>
+              <a:t>1.  Estimates by Hydrogen Council; Grey H2 production costs assuming natural gas prices of $4-$8/mmBtu; Blue H2 costs assuming Grey costs + $0.5/kg;</a:t>
+            </a:r>
+            <a:endParaRPr lang="en-US" sz="600" dirty="0"/>
+          </a:p>
+          <a:p>
+            <a:pPr indent="0" marL="0">
+              <a:lnSpc>
+                <a:spcPct val="115000"/>
+              </a:lnSpc>
+              <a:buNone/>
+            </a:pPr>
+            <a:r>
+              <a:rPr lang="en-US" sz="600" dirty="0">
+                <a:solidFill>
+                  <a:srgbClr val="666666"/>
+                </a:solidFill>
+                <a:latin typeface="Calibri" pitchFamily="34" charset="0"/>
+                <a:ea typeface="Calibri" pitchFamily="34" charset="-122"/>
+                <a:cs typeface="Calibri" pitchFamily="34" charset="-120"/>
+              </a:rPr>
+              <a:t>     Green H2 costs assuming IRENA database weighted average solar PV costs (auctions and PPAs) in 2020</a:t>
+            </a:r>
+            <a:endParaRPr lang="en-US" sz="600" dirty="0"/>
+          </a:p>
+        </p:txBody>
+      </p:sp>
+      <p:sp>
+        <p:nvSpPr>
+          <p:cNvPr id="13" name="Shape 10"/>
+          <p:cNvSpPr/>
+          <p:nvPr/>
+        </p:nvSpPr>
+        <p:spPr>
+          <a:xfrm>
+            <a:off x="457200" y="4663440"/>
+            <a:ext cx="8229600" cy="0"/>
           </a:xfrm>
           <a:prstGeom prst="line">
             <a:avLst/>
@@ -3493,14 +3478,14 @@
       </p:sp>
       <p:sp>
         <p:nvSpPr>
-          <p:cNvPr id="33" name="Text 30"/>
+          <p:cNvPr id="14" name="Text 11"/>
           <p:cNvSpPr/>
           <p:nvPr/>
         </p:nvSpPr>
         <p:spPr>
           <a:xfrm>
-            <a:off x="457200" y="5943600"/>
-            <a:ext cx="7315200" cy="228600"/>
+            <a:off x="6400800" y="4709160"/>
+            <a:ext cx="2286000" cy="182880"/>
           </a:xfrm>
           <a:prstGeom prst="rect">
             <a:avLst/>
@@ -3509,75 +3494,22 @@
           <a:ln/>
         </p:spPr>
         <p:txBody>
-          <a:bodyPr wrap="square" lIns="0" tIns="0" rIns="0" bIns="0" rtlCol="0" anchor="t"/>
-          <a:lstStyle/>
-          <a:p>
-            <a:pPr indent="0" marL="0">
-              <a:buNone/>
-            </a:pPr>
-            <a:r>
-              <a:rPr lang="en-US" sz="700" dirty="0">
-                <a:solidFill>
-                  <a:srgbClr val="999999"/>
-                </a:solidFill>
-                <a:latin typeface="Calibri" pitchFamily="34" charset="0"/>
-                <a:ea typeface="Calibri" pitchFamily="34" charset="-122"/>
-                <a:cs typeface="Calibri" pitchFamily="34" charset="-120"/>
-              </a:rPr>
-              <a:t>Source: Dutch Ministry of Economic Affairs and Climate Policy; European Commission REPowerEU; HyNetwork Services</a:t>
-            </a:r>
-            <a:endParaRPr lang="en-US" sz="700" dirty="0"/>
-          </a:p>
-        </p:txBody>
-      </p:sp>
-      <p:sp>
-        <p:nvSpPr>
-          <p:cNvPr id="34" name="Text 31"/>
-          <p:cNvSpPr/>
-          <p:nvPr/>
-        </p:nvSpPr>
-        <p:spPr>
-          <a:xfrm>
-            <a:off x="8686800" y="5943600"/>
-            <a:ext cx="3044952" cy="228600"/>
-          </a:xfrm>
-          <a:prstGeom prst="rect">
-            <a:avLst/>
-          </a:prstGeom>
-          <a:noFill/>
-          <a:ln/>
-        </p:spPr>
-        <p:txBody>
-          <a:bodyPr wrap="square" lIns="0" tIns="0" rIns="0" bIns="0" rtlCol="0" anchor="t"/>
+          <a:bodyPr wrap="square" lIns="0" tIns="0" rIns="0" bIns="0" rtlCol="0" anchor="ctr"/>
           <a:lstStyle/>
           <a:p>
             <a:pPr algn="r" indent="0" marL="0">
               <a:buNone/>
             </a:pPr>
             <a:r>
-              <a:rPr lang="en-US" sz="800" b="1" dirty="0">
+              <a:rPr lang="en-US" sz="800" dirty="0">
                 <a:solidFill>
-                  <a:srgbClr val="000000"/>
+                  <a:srgbClr val="666666"/>
                 </a:solidFill>
                 <a:latin typeface="Calibri" pitchFamily="34" charset="0"/>
                 <a:ea typeface="Calibri" pitchFamily="34" charset="-122"/>
                 <a:cs typeface="Calibri" pitchFamily="34" charset="-120"/>
               </a:rPr>
-              <a:t>McKinsey &amp; Company</a:t>
-            </a:r>
-            <a:pPr algn="r" indent="0" marL="0">
-              <a:buNone/>
-            </a:pPr>
-            <a:r>
-              <a:rPr lang="en-US" sz="800" dirty="0">
-                <a:solidFill>
-                  <a:srgbClr val="000000"/>
-                </a:solidFill>
-                <a:latin typeface="Calibri" pitchFamily="34" charset="0"/>
-                <a:ea typeface="Calibri" pitchFamily="34" charset="-122"/>
-                <a:cs typeface="Calibri" pitchFamily="34" charset="-120"/>
-              </a:rPr>
-              <a:t>  1</a:t>
+              <a:t>McKinsey &amp; Company    5</a:t>
             </a:r>
             <a:endParaRPr lang="en-US" sz="800" dirty="0"/>
           </a:p>
